--- a/chapter 18.pptx
+++ b/chapter 18.pptx
@@ -5,30 +5,33 @@
     <p:sldMasterId id="2147483648" r:id="rId1"/>
   </p:sldMasterIdLst>
   <p:notesMasterIdLst>
-    <p:notesMasterId r:id="rId20"/>
+    <p:notesMasterId r:id="rId23"/>
   </p:notesMasterIdLst>
   <p:handoutMasterIdLst>
-    <p:handoutMasterId r:id="rId21"/>
+    <p:handoutMasterId r:id="rId24"/>
   </p:handoutMasterIdLst>
   <p:sldIdLst>
     <p:sldId id="259" r:id="rId2"/>
     <p:sldId id="264" r:id="rId3"/>
-    <p:sldId id="282" r:id="rId4"/>
-    <p:sldId id="283" r:id="rId5"/>
-    <p:sldId id="284" r:id="rId6"/>
-    <p:sldId id="285" r:id="rId7"/>
-    <p:sldId id="286" r:id="rId8"/>
-    <p:sldId id="287" r:id="rId9"/>
-    <p:sldId id="288" r:id="rId10"/>
-    <p:sldId id="289" r:id="rId11"/>
-    <p:sldId id="290" r:id="rId12"/>
-    <p:sldId id="291" r:id="rId13"/>
-    <p:sldId id="292" r:id="rId14"/>
-    <p:sldId id="293" r:id="rId15"/>
-    <p:sldId id="294" r:id="rId16"/>
-    <p:sldId id="295" r:id="rId17"/>
-    <p:sldId id="296" r:id="rId18"/>
-    <p:sldId id="297" r:id="rId19"/>
+    <p:sldId id="298" r:id="rId4"/>
+    <p:sldId id="299" r:id="rId5"/>
+    <p:sldId id="282" r:id="rId6"/>
+    <p:sldId id="283" r:id="rId7"/>
+    <p:sldId id="284" r:id="rId8"/>
+    <p:sldId id="285" r:id="rId9"/>
+    <p:sldId id="286" r:id="rId10"/>
+    <p:sldId id="287" r:id="rId11"/>
+    <p:sldId id="288" r:id="rId12"/>
+    <p:sldId id="289" r:id="rId13"/>
+    <p:sldId id="290" r:id="rId14"/>
+    <p:sldId id="291" r:id="rId15"/>
+    <p:sldId id="292" r:id="rId16"/>
+    <p:sldId id="293" r:id="rId17"/>
+    <p:sldId id="294" r:id="rId18"/>
+    <p:sldId id="295" r:id="rId19"/>
+    <p:sldId id="296" r:id="rId20"/>
+    <p:sldId id="297" r:id="rId21"/>
+    <p:sldId id="300" r:id="rId22"/>
   </p:sldIdLst>
   <p:sldSz cx="12192000" cy="6858000"/>
   <p:notesSz cx="6858000" cy="9144000"/>
@@ -243,7 +246,7 @@
           <a:p>
             <a:fld id="{13928E3B-7122-43E6-B3BB-09448C56C96C}" type="datetimeFigureOut">
               <a:rPr lang="en-US" smtClean="0"/>
-              <a:t>25/05/12</a:t>
+              <a:t>25/07/20</a:t>
             </a:fld>
             <a:endParaRPr lang="en-US" dirty="0"/>
           </a:p>
@@ -421,7 +424,7 @@
           <a:p>
             <a:fld id="{B98C9CAF-43DF-44BF-8016-DC193E4E594B}" type="datetimeFigureOut">
               <a:rPr lang="en-US" smtClean="0"/>
-              <a:t>25/05/12</a:t>
+              <a:t>25/07/20</a:t>
             </a:fld>
             <a:endParaRPr lang="en-US" dirty="0"/>
           </a:p>
@@ -2594,6 +2597,240 @@
 </p:sldLayout>
 </file>
 
+<file path=ppt/slideLayouts/slideLayout7.xml><?xml version="1.0" encoding="utf-8"?>
+<p:sldLayout xmlns:a="http://schemas.openxmlformats.org/drawingml/2006/main" xmlns:r="http://schemas.openxmlformats.org/officeDocument/2006/relationships" xmlns:p="http://schemas.openxmlformats.org/presentationml/2006/main" preserve="1" userDrawn="1">
+  <p:cSld name="نقل قول">
+    <p:spTree>
+      <p:nvGrpSpPr>
+        <p:cNvPr id="1" name=""/>
+        <p:cNvGrpSpPr/>
+        <p:nvPr/>
+      </p:nvGrpSpPr>
+      <p:grpSpPr>
+        <a:xfrm>
+          <a:off x="0" y="0"/>
+          <a:ext cx="0" cy="0"/>
+          <a:chOff x="0" y="0"/>
+          <a:chExt cx="0" cy="0"/>
+        </a:xfrm>
+      </p:grpSpPr>
+      <p:sp>
+        <p:nvSpPr>
+          <p:cNvPr id="4" name="Slide Number Placeholder 3">
+            <a:extLst>
+              <a:ext uri="{FF2B5EF4-FFF2-40B4-BE49-F238E27FC236}">
+                <a16:creationId xmlns:a16="http://schemas.microsoft.com/office/drawing/2014/main" id="{B3D763EB-F58C-2FDA-883E-D34AC3F89BD8}"/>
+              </a:ext>
+            </a:extLst>
+          </p:cNvPr>
+          <p:cNvSpPr>
+            <a:spLocks noGrp="1"/>
+          </p:cNvSpPr>
+          <p:nvPr>
+            <p:ph type="sldNum" sz="quarter" idx="10"/>
+          </p:nvPr>
+        </p:nvSpPr>
+        <p:spPr/>
+        <p:txBody>
+          <a:bodyPr/>
+          <a:lstStyle/>
+          <a:p>
+            <a:fld id="{AE311D09-C3D9-45E8-99CE-78E12234EEAD}" type="slidenum">
+              <a:rPr lang="en-US" smtClean="0"/>
+              <a:pPr/>
+              <a:t>‹#›</a:t>
+            </a:fld>
+            <a:endParaRPr lang="en-US" dirty="0"/>
+          </a:p>
+        </p:txBody>
+      </p:sp>
+      <p:sp>
+        <p:nvSpPr>
+          <p:cNvPr id="6" name="TextBox 5">
+            <a:extLst>
+              <a:ext uri="{FF2B5EF4-FFF2-40B4-BE49-F238E27FC236}">
+                <a16:creationId xmlns:a16="http://schemas.microsoft.com/office/drawing/2014/main" id="{E9BD9CD7-C12F-5578-3913-F6206D50C27B}"/>
+              </a:ext>
+            </a:extLst>
+          </p:cNvPr>
+          <p:cNvSpPr txBox="1"/>
+          <p:nvPr userDrawn="1"/>
+        </p:nvSpPr>
+        <p:spPr>
+          <a:xfrm>
+            <a:off x="1859302" y="1303253"/>
+            <a:ext cx="1168061" cy="1107996"/>
+          </a:xfrm>
+          <a:prstGeom prst="rect">
+            <a:avLst/>
+          </a:prstGeom>
+          <a:noFill/>
+        </p:spPr>
+        <p:txBody>
+          <a:bodyPr wrap="square" rtlCol="0" anchor="ctr">
+            <a:spAutoFit/>
+          </a:bodyPr>
+          <a:lstStyle/>
+          <a:p>
+            <a:pPr marL="0" indent="0" algn="ctr">
+              <a:buFont typeface="Arial" panose="020B0604020202020204" pitchFamily="34" charset="0"/>
+              <a:buNone/>
+            </a:pPr>
+            <a:r>
+              <a:rPr lang="en-US" sz="6600" b="1" dirty="0">
+                <a:latin typeface="+mj-lt"/>
+              </a:rPr>
+              <a:t>“</a:t>
+            </a:r>
+          </a:p>
+        </p:txBody>
+      </p:sp>
+      <p:sp>
+        <p:nvSpPr>
+          <p:cNvPr id="8" name="TextBox 7">
+            <a:extLst>
+              <a:ext uri="{FF2B5EF4-FFF2-40B4-BE49-F238E27FC236}">
+                <a16:creationId xmlns:a16="http://schemas.microsoft.com/office/drawing/2014/main" id="{E62C21CC-5ED0-E64B-EAB7-020E97E35EDD}"/>
+              </a:ext>
+            </a:extLst>
+          </p:cNvPr>
+          <p:cNvSpPr txBox="1"/>
+          <p:nvPr userDrawn="1"/>
+        </p:nvSpPr>
+        <p:spPr>
+          <a:xfrm>
+            <a:off x="9205913" y="3698406"/>
+            <a:ext cx="1168061" cy="1107996"/>
+          </a:xfrm>
+          <a:prstGeom prst="rect">
+            <a:avLst/>
+          </a:prstGeom>
+          <a:noFill/>
+        </p:spPr>
+        <p:txBody>
+          <a:bodyPr wrap="square" rtlCol="0" anchor="ctr">
+            <a:spAutoFit/>
+          </a:bodyPr>
+          <a:lstStyle/>
+          <a:p>
+            <a:pPr marL="0" indent="0" algn="ctr">
+              <a:buFont typeface="Arial" panose="020B0604020202020204" pitchFamily="34" charset="0"/>
+              <a:buNone/>
+            </a:pPr>
+            <a:r>
+              <a:rPr lang="en-US" sz="6600" b="1" dirty="0">
+                <a:latin typeface="+mj-lt"/>
+              </a:rPr>
+              <a:t>”</a:t>
+            </a:r>
+          </a:p>
+        </p:txBody>
+      </p:sp>
+      <p:sp>
+        <p:nvSpPr>
+          <p:cNvPr id="10" name="Text Placeholder 9">
+            <a:extLst>
+              <a:ext uri="{FF2B5EF4-FFF2-40B4-BE49-F238E27FC236}">
+                <a16:creationId xmlns:a16="http://schemas.microsoft.com/office/drawing/2014/main" id="{3CC271C3-2751-4DDA-C95D-61E65E2C4072}"/>
+              </a:ext>
+            </a:extLst>
+          </p:cNvPr>
+          <p:cNvSpPr>
+            <a:spLocks noGrp="1"/>
+          </p:cNvSpPr>
+          <p:nvPr>
+            <p:ph type="body" sz="quarter" idx="11"/>
+          </p:nvPr>
+        </p:nvSpPr>
+        <p:spPr>
+          <a:xfrm>
+            <a:off x="3027363" y="1627188"/>
+            <a:ext cx="6178550" cy="2625216"/>
+          </a:xfrm>
+          <a:prstGeom prst="rect">
+            <a:avLst/>
+          </a:prstGeom>
+        </p:spPr>
+        <p:txBody>
+          <a:bodyPr anchor="ctr"/>
+          <a:lstStyle>
+            <a:lvl1pPr marL="0" indent="0" algn="ctr">
+              <a:buNone/>
+              <a:defRPr sz="3200" b="0" i="1">
+                <a:solidFill>
+                  <a:schemeClr val="bg2">
+                    <a:lumMod val="25000"/>
+                  </a:schemeClr>
+                </a:solidFill>
+                <a:latin typeface="+mj-lt"/>
+              </a:defRPr>
+            </a:lvl1pPr>
+          </a:lstStyle>
+          <a:p>
+            <a:pPr lvl="0"/>
+            <a:endParaRPr lang="en-US" dirty="0"/>
+          </a:p>
+        </p:txBody>
+      </p:sp>
+      <p:sp>
+        <p:nvSpPr>
+          <p:cNvPr id="12" name="Text Placeholder 11">
+            <a:extLst>
+              <a:ext uri="{FF2B5EF4-FFF2-40B4-BE49-F238E27FC236}">
+                <a16:creationId xmlns:a16="http://schemas.microsoft.com/office/drawing/2014/main" id="{0F6E1FB4-261B-CA90-BDD6-924DC2566383}"/>
+              </a:ext>
+            </a:extLst>
+          </p:cNvPr>
+          <p:cNvSpPr>
+            <a:spLocks noGrp="1"/>
+          </p:cNvSpPr>
+          <p:nvPr>
+            <p:ph type="body" sz="quarter" idx="12"/>
+          </p:nvPr>
+        </p:nvSpPr>
+        <p:spPr>
+          <a:xfrm>
+            <a:off x="3027364" y="5229225"/>
+            <a:ext cx="6178550" cy="711200"/>
+          </a:xfrm>
+          <a:prstGeom prst="rect">
+            <a:avLst/>
+          </a:prstGeom>
+        </p:spPr>
+        <p:txBody>
+          <a:bodyPr anchor="ctr"/>
+          <a:lstStyle>
+            <a:lvl1pPr marL="0" indent="0" algn="ctr">
+              <a:buNone/>
+              <a:defRPr sz="1600">
+                <a:solidFill>
+                  <a:schemeClr val="bg2">
+                    <a:lumMod val="50000"/>
+                  </a:schemeClr>
+                </a:solidFill>
+                <a:latin typeface="+mj-lt"/>
+              </a:defRPr>
+            </a:lvl1pPr>
+          </a:lstStyle>
+          <a:p>
+            <a:pPr lvl="0"/>
+            <a:endParaRPr lang="en-US" dirty="0"/>
+          </a:p>
+        </p:txBody>
+      </p:sp>
+    </p:spTree>
+    <p:extLst>
+      <p:ext uri="{BB962C8B-B14F-4D97-AF65-F5344CB8AC3E}">
+        <p14:creationId xmlns:p14="http://schemas.microsoft.com/office/powerpoint/2010/main" val="3512120341"/>
+      </p:ext>
+    </p:extLst>
+  </p:cSld>
+  <p:clrMapOvr>
+    <a:masterClrMapping/>
+  </p:clrMapOvr>
+</p:sldLayout>
+</file>
+
 <file path=ppt/slideMasters/slideMaster1.xml><?xml version="1.0" encoding="utf-8"?>
 <p:sldMaster xmlns:a="http://schemas.openxmlformats.org/drawingml/2006/main" xmlns:r="http://schemas.openxmlformats.org/officeDocument/2006/relationships" xmlns:p="http://schemas.openxmlformats.org/presentationml/2006/main">
   <p:cSld>
@@ -2720,7 +2957,7 @@
           <p:nvPr userDrawn="1"/>
         </p:nvPicPr>
         <p:blipFill>
-          <a:blip r:embed="rId8">
+          <a:blip r:embed="rId9">
             <a:extLst>
               <a:ext uri="{28A0092B-C50C-407E-A947-70E740481C1C}">
                 <a14:useLocalDpi xmlns:a14="http://schemas.microsoft.com/office/drawing/2010/main" val="0"/>
@@ -2756,6 +2993,7 @@
     <p:sldLayoutId id="2147483651" r:id="rId4"/>
     <p:sldLayoutId id="2147483652" r:id="rId5"/>
     <p:sldLayoutId id="2147483653" r:id="rId6"/>
+    <p:sldLayoutId id="2147483655" r:id="rId7"/>
   </p:sldLayoutIdLst>
   <p:hf hdr="0" ftr="0" dt="0"/>
   <p:txStyles>
@@ -3093,7 +3331,7 @@
           <p:cNvPr id="2" name="Content Placeholder 1">
             <a:extLst>
               <a:ext uri="{FF2B5EF4-FFF2-40B4-BE49-F238E27FC236}">
-                <a16:creationId xmlns:a16="http://schemas.microsoft.com/office/drawing/2014/main" id="{32634000-35A5-37B3-A1C6-4CD9DF196DEE}"/>
+                <a16:creationId xmlns:a16="http://schemas.microsoft.com/office/drawing/2014/main" id="{3FB29733-1634-E44B-B3F7-16B9E97981A9}"/>
               </a:ext>
             </a:extLst>
           </p:cNvPr>
@@ -3109,13 +3347,6 @@
           <a:bodyPr/>
           <a:lstStyle/>
           <a:p>
-            <a:r>
-              <a:rPr lang="en-US" dirty="0"/>
-              <a:t>Some of the functions that must be achieved in the stack:</a:t>
-            </a:r>
-          </a:p>
-          <a:p>
-            <a:pPr lvl="1"/>
             <a:r>
               <a:rPr lang="en-US" dirty="0">
                 <a:solidFill>
@@ -3124,26 +3355,28 @@
                   </a:schemeClr>
                 </a:solidFill>
               </a:rPr>
-              <a:t>Reading raw data</a:t>
-            </a:r>
-            <a:endParaRPr lang="en-US" dirty="0"/>
-          </a:p>
-          <a:p>
-            <a:pPr lvl="2"/>
-            <a:r>
-              <a:rPr lang="en-US" dirty="0"/>
-              <a:t>The lowest level of the stack is a software driver to read the raw data.</a:t>
-            </a:r>
-          </a:p>
-          <a:p>
-            <a:pPr lvl="2"/>
-            <a:r>
-              <a:rPr lang="en-US" dirty="0"/>
-              <a:t>The period frequency is a parameter that will influence both the processor load and the accuracy of the created representation.</a:t>
+              <a:t>Intermittent/Limited/No Connectivity</a:t>
             </a:r>
           </a:p>
           <a:p>
             <a:pPr lvl="1"/>
+            <a:r>
+              <a:rPr lang="en-US" dirty="0"/>
+              <a:t>Sometimes, a device will temporarily lose its network connection.</a:t>
+            </a:r>
+          </a:p>
+          <a:p>
+            <a:pPr lvl="1"/>
+            <a:r>
+              <a:rPr lang="en-US" b="1" dirty="0"/>
+              <a:t>Architect’s job:</a:t>
+            </a:r>
+            <a:r>
+              <a:rPr lang="en-US" dirty="0"/>
+              <a:t> Design the system so it can handle network loss gracefully—save data, retry later, or switch to offline mode without breaking or losing work.</a:t>
+            </a:r>
+          </a:p>
+          <a:p>
             <a:r>
               <a:rPr lang="en-US" dirty="0">
                 <a:solidFill>
@@ -3152,14 +3385,25 @@
                   </a:schemeClr>
                 </a:solidFill>
               </a:rPr>
-              <a:t>Smoothing data</a:t>
-            </a:r>
-          </a:p>
-          <a:p>
-            <a:pPr lvl="2"/>
-            <a:r>
-              <a:rPr lang="en-US" dirty="0"/>
-              <a:t>Raw data usually has a great deal of noise or variation.</a:t>
+              <a:t>Security</a:t>
+            </a:r>
+          </a:p>
+          <a:p>
+            <a:pPr lvl="1"/>
+            <a:r>
+              <a:rPr lang="en-US" dirty="0"/>
+              <a:t>Mobile communications are easy targets for attacks like data theft or fake networks.</a:t>
+            </a:r>
+          </a:p>
+          <a:p>
+            <a:pPr lvl="1"/>
+            <a:r>
+              <a:rPr lang="en-US" b="1" dirty="0"/>
+              <a:t>Architect’s job:</a:t>
+            </a:r>
+            <a:r>
+              <a:rPr lang="en-US" dirty="0"/>
+              <a:t> Protect communication with strong security measures (encryption, authentication, etc.) and be ready to respond to attacks.</a:t>
             </a:r>
             <a:endParaRPr lang="en-US" dirty="0">
               <a:solidFill>
@@ -3169,81 +3413,6 @@
               </a:solidFill>
             </a:endParaRPr>
           </a:p>
-          <a:p>
-            <a:pPr lvl="2"/>
-            <a:r>
-              <a:rPr lang="en-US" dirty="0"/>
-              <a:t>Smoothing techniques take multiple readings over time to create a more reliable result.</a:t>
-            </a:r>
-            <a:endParaRPr lang="en-US" b="1" dirty="0">
-              <a:solidFill>
-                <a:schemeClr val="accent4">
-                  <a:lumMod val="50000"/>
-                </a:schemeClr>
-              </a:solidFill>
-            </a:endParaRPr>
-          </a:p>
-          <a:p>
-            <a:pPr lvl="1"/>
-            <a:r>
-              <a:rPr lang="en-US" dirty="0">
-                <a:solidFill>
-                  <a:schemeClr val="accent4">
-                    <a:lumMod val="50000"/>
-                  </a:schemeClr>
-                </a:solidFill>
-              </a:rPr>
-              <a:t>Converting Data</a:t>
-            </a:r>
-          </a:p>
-          <a:p>
-            <a:pPr lvl="2"/>
-            <a:r>
-              <a:rPr lang="en-US" dirty="0"/>
-              <a:t>Different sensors might measure the same thing but report it in different formats.</a:t>
-            </a:r>
-          </a:p>
-          <a:p>
-            <a:pPr lvl="2"/>
-            <a:r>
-              <a:rPr lang="en-US" dirty="0"/>
-              <a:t>The system must standardize these readings.</a:t>
-            </a:r>
-          </a:p>
-          <a:p>
-            <a:pPr lvl="1"/>
-            <a:r>
-              <a:rPr lang="en-US" dirty="0">
-                <a:solidFill>
-                  <a:schemeClr val="accent4">
-                    <a:lumMod val="50000"/>
-                  </a:schemeClr>
-                </a:solidFill>
-              </a:rPr>
-              <a:t>Sensor Fusion</a:t>
-            </a:r>
-          </a:p>
-          <a:p>
-            <a:pPr lvl="2"/>
-            <a:r>
-              <a:rPr lang="en-US" dirty="0"/>
-              <a:t>No single sensor gives the full picture. </a:t>
-            </a:r>
-          </a:p>
-          <a:p>
-            <a:pPr lvl="2"/>
-            <a:r>
-              <a:rPr lang="en-US" dirty="0"/>
-              <a:t>Sensor fusion means combining data from multiple different sensors to get a better understanding.</a:t>
-            </a:r>
-            <a:endParaRPr lang="en-US" dirty="0">
-              <a:solidFill>
-                <a:schemeClr val="accent4">
-                  <a:lumMod val="50000"/>
-                </a:schemeClr>
-              </a:solidFill>
-            </a:endParaRPr>
-          </a:p>
         </p:txBody>
       </p:sp>
       <p:sp>
@@ -3251,7 +3420,7 @@
           <p:cNvPr id="3" name="Title 2">
             <a:extLst>
               <a:ext uri="{FF2B5EF4-FFF2-40B4-BE49-F238E27FC236}">
-                <a16:creationId xmlns:a16="http://schemas.microsoft.com/office/drawing/2014/main" id="{1111DF01-69C9-0AB5-E6C1-BAFC5D212943}"/>
+                <a16:creationId xmlns:a16="http://schemas.microsoft.com/office/drawing/2014/main" id="{76F0A9AB-AD14-E619-00B8-FAF6DB192508}"/>
               </a:ext>
             </a:extLst>
           </p:cNvPr>
@@ -3269,7 +3438,7 @@
           <a:p>
             <a:r>
               <a:rPr lang="en-US" dirty="0"/>
-              <a:t>18.3 Sensors and Actuators</a:t>
+              <a:t>18.2 Network Connectivity</a:t>
             </a:r>
           </a:p>
         </p:txBody>
@@ -3279,7 +3448,7 @@
           <p:cNvPr id="4" name="Slide Number Placeholder 3">
             <a:extLst>
               <a:ext uri="{FF2B5EF4-FFF2-40B4-BE49-F238E27FC236}">
-                <a16:creationId xmlns:a16="http://schemas.microsoft.com/office/drawing/2014/main" id="{74686158-9B89-7BD9-A038-87689619DBCB}"/>
+                <a16:creationId xmlns:a16="http://schemas.microsoft.com/office/drawing/2014/main" id="{465EE25A-8C70-5FE8-6422-E5CCFAF52A18}"/>
               </a:ext>
             </a:extLst>
           </p:cNvPr>
@@ -3307,7 +3476,7 @@
     </p:spTree>
     <p:extLst>
       <p:ext uri="{BB962C8B-B14F-4D97-AF65-F5344CB8AC3E}">
-        <p14:creationId xmlns:p14="http://schemas.microsoft.com/office/powerpoint/2010/main" val="4038948653"/>
+        <p14:creationId xmlns:p14="http://schemas.microsoft.com/office/powerpoint/2010/main" val="222167287"/>
       </p:ext>
     </p:extLst>
   </p:cSld>
@@ -3339,7 +3508,7 @@
           <p:cNvPr id="2" name="Content Placeholder 1">
             <a:extLst>
               <a:ext uri="{FF2B5EF4-FFF2-40B4-BE49-F238E27FC236}">
-                <a16:creationId xmlns:a16="http://schemas.microsoft.com/office/drawing/2014/main" id="{53EC2AEC-BA4A-01B0-D6BE-C11C969DA5A0}"/>
+                <a16:creationId xmlns:a16="http://schemas.microsoft.com/office/drawing/2014/main" id="{B98CE935-FB94-3FCE-FCA4-4760CC158A3B}"/>
               </a:ext>
             </a:extLst>
           </p:cNvPr>
@@ -3357,111 +3526,98 @@
           <a:p>
             <a:r>
               <a:rPr lang="en-US" dirty="0"/>
-              <a:t>An architect must make a number of important decisions surrounding resources and their usage:</a:t>
-            </a:r>
-          </a:p>
-          <a:p>
+              <a:t>A </a:t>
+            </a:r>
             <a:r>
               <a:rPr lang="en-US" dirty="0">
                 <a:solidFill>
-                  <a:schemeClr val="accent4">
-                    <a:lumMod val="50000"/>
-                  </a:schemeClr>
+                  <a:schemeClr val="accent1"/>
                 </a:solidFill>
               </a:rPr>
-              <a:t>Assigning tasks to electronic control units </a:t>
-            </a:r>
-            <a:r>
-              <a:rPr lang="en-US" dirty="0"/>
-              <a:t>(ECUs)</a:t>
-            </a:r>
-            <a:endParaRPr lang="en-US" dirty="0">
-              <a:solidFill>
-                <a:schemeClr val="accent4">
-                  <a:lumMod val="50000"/>
-                </a:schemeClr>
-              </a:solidFill>
-            </a:endParaRPr>
+              <a:t>sensor</a:t>
+            </a:r>
+            <a:r>
+              <a:rPr lang="en-US" dirty="0"/>
+              <a:t> is a device that detects the physical characteristics of its environment and translates those characteristics into an electronic </a:t>
+            </a:r>
+            <a:r>
+              <a:rPr lang="en-US" dirty="0">
+                <a:solidFill>
+                  <a:schemeClr val="accent1"/>
+                </a:solidFill>
+              </a:rPr>
+              <a:t>representation</a:t>
+            </a:r>
+            <a:r>
+              <a:rPr lang="en-US" dirty="0"/>
+              <a:t>.</a:t>
+            </a:r>
+          </a:p>
+          <a:p>
+            <a:r>
+              <a:rPr lang="en-US" dirty="0"/>
+              <a:t>An architect has several concerns with respect to sensors: </a:t>
+            </a:r>
           </a:p>
           <a:p>
             <a:pPr lvl="1"/>
             <a:r>
               <a:rPr lang="en-US" dirty="0"/>
-              <a:t>Larger mobile systems (like cars or planes) have multiple ECUs (small computers), and the architect must decide which software tasks go to which ECU.</a:t>
+              <a:t>How to create an accurate representation of the environment based on the sensor inputs.</a:t>
             </a:r>
           </a:p>
           <a:p>
             <a:pPr lvl="1"/>
             <a:r>
-              <a:rPr lang="en-US" b="1" dirty="0"/>
-              <a:t>Fit of the ECU to the function: </a:t>
-            </a:r>
-            <a:r>
-              <a:rPr lang="en-US" dirty="0"/>
-              <a:t>Put functions on ECUs powerful enough to handle them.</a:t>
+              <a:rPr lang="en-US" dirty="0"/>
+              <a:t>How the system should respond to that representation of the environment.</a:t>
             </a:r>
           </a:p>
           <a:p>
             <a:pPr lvl="1"/>
             <a:r>
-              <a:rPr lang="en-US" b="1" dirty="0"/>
-              <a:t>Criticality: </a:t>
-            </a:r>
-            <a:r>
-              <a:rPr lang="en-US" dirty="0"/>
-              <a:t>More powerful ECUs may be reserved for critical functions.</a:t>
+              <a:rPr lang="en-US" dirty="0"/>
+              <a:t>Security and privacy of the sensor data and actuator commands.</a:t>
             </a:r>
           </a:p>
           <a:p>
             <a:pPr lvl="1"/>
             <a:r>
-              <a:rPr lang="en-US" b="1" dirty="0"/>
-              <a:t>Location in the vehicle: </a:t>
-            </a:r>
-            <a:r>
-              <a:rPr lang="en-US" dirty="0"/>
-              <a:t>Sometimes, location matters—e.g., First-class passengers may have better Wi-Fi connectivity than second-class passengers.</a:t>
+              <a:rPr lang="en-US" dirty="0"/>
+              <a:t>Degraded operation. If sensors fail or become unreadable, the system should enter a degraded mode. </a:t>
+            </a:r>
+          </a:p>
+          <a:p>
+            <a:pPr lvl="2"/>
+            <a:r>
+              <a:rPr lang="en-US" dirty="0"/>
+              <a:t>For example, if GPS readings are not available in tunnels, the system can use dead reckoning techniques to estimate location.</a:t>
+            </a:r>
+          </a:p>
+          <a:p>
+            <a:r>
+              <a:rPr lang="en-US" dirty="0"/>
+              <a:t>Here we will focus on only the first concern.</a:t>
             </a:r>
           </a:p>
           <a:p>
             <a:pPr lvl="1"/>
             <a:r>
-              <a:rPr lang="en-US" b="1" dirty="0"/>
-              <a:t>Connectivity: </a:t>
-            </a:r>
-            <a:r>
-              <a:rPr lang="en-US" dirty="0"/>
-              <a:t>If a function is split across ECUs, they must be able to communicate easily over the internal network.</a:t>
-            </a:r>
-          </a:p>
-          <a:p>
-            <a:pPr lvl="1"/>
-            <a:r>
-              <a:rPr lang="en-US" b="1" dirty="0"/>
-              <a:t>Locality of Communication: </a:t>
-            </a:r>
-            <a:r>
-              <a:rPr lang="en-US" dirty="0"/>
-              <a:t>Functions that talk to each other a lot should be on the same ECU to reduce communication delays and traffic.</a:t>
-            </a:r>
-          </a:p>
-          <a:p>
-            <a:pPr lvl="1"/>
-            <a:r>
-              <a:rPr lang="en-US" b="1" dirty="0"/>
-              <a:t>Cost:</a:t>
-            </a:r>
-            <a:r>
-              <a:rPr lang="en-US" dirty="0"/>
-              <a:t> Typically, a manufacturer wants to minimize the number of ECUs deployed.</a:t>
-            </a:r>
-            <a:endParaRPr lang="en-US" b="1" dirty="0">
-              <a:solidFill>
-                <a:schemeClr val="accent4">
-                  <a:lumMod val="50000"/>
-                </a:schemeClr>
-              </a:solidFill>
-            </a:endParaRPr>
+              <a:rPr lang="en-US" dirty="0"/>
+              <a:t>This is performed using the</a:t>
+            </a:r>
+            <a:r>
+              <a:rPr lang="en-US" dirty="0">
+                <a:solidFill>
+                  <a:schemeClr val="accent1"/>
+                </a:solidFill>
+              </a:rPr>
+              <a:t> sensor stack</a:t>
+            </a:r>
+            <a:r>
+              <a:rPr lang="en-US" dirty="0"/>
+              <a:t>—a confederation of devices and software drivers that help turn raw data into interpreted information about the environment.</a:t>
+            </a:r>
           </a:p>
         </p:txBody>
       </p:sp>
@@ -3470,7 +3626,7 @@
           <p:cNvPr id="3" name="Title 2">
             <a:extLst>
               <a:ext uri="{FF2B5EF4-FFF2-40B4-BE49-F238E27FC236}">
-                <a16:creationId xmlns:a16="http://schemas.microsoft.com/office/drawing/2014/main" id="{E0A11556-B073-9361-6161-AF69F9369213}"/>
+                <a16:creationId xmlns:a16="http://schemas.microsoft.com/office/drawing/2014/main" id="{7614DD60-EC70-8BFA-7447-75E2F4A2D671}"/>
               </a:ext>
             </a:extLst>
           </p:cNvPr>
@@ -3483,12 +3639,14 @@
         </p:nvSpPr>
         <p:spPr/>
         <p:txBody>
-          <a:bodyPr/>
+          <a:bodyPr>
+            <a:normAutofit/>
+          </a:bodyPr>
           <a:lstStyle/>
           <a:p>
             <a:r>
               <a:rPr lang="en-US" dirty="0"/>
-              <a:t>18.4 Resources</a:t>
+              <a:t>18.3 Sensors and Actuators</a:t>
             </a:r>
           </a:p>
         </p:txBody>
@@ -3498,7 +3656,7 @@
           <p:cNvPr id="4" name="Slide Number Placeholder 3">
             <a:extLst>
               <a:ext uri="{FF2B5EF4-FFF2-40B4-BE49-F238E27FC236}">
-                <a16:creationId xmlns:a16="http://schemas.microsoft.com/office/drawing/2014/main" id="{B35AFF80-04B8-FB36-4289-BD2F7670C21E}"/>
+                <a16:creationId xmlns:a16="http://schemas.microsoft.com/office/drawing/2014/main" id="{A6348AD6-C9CE-E594-20EC-002B5776D37A}"/>
               </a:ext>
             </a:extLst>
           </p:cNvPr>
@@ -3526,7 +3684,7 @@
     </p:spTree>
     <p:extLst>
       <p:ext uri="{BB962C8B-B14F-4D97-AF65-F5344CB8AC3E}">
-        <p14:creationId xmlns:p14="http://schemas.microsoft.com/office/powerpoint/2010/main" val="2295808854"/>
+        <p14:creationId xmlns:p14="http://schemas.microsoft.com/office/powerpoint/2010/main" val="3211065884"/>
       </p:ext>
     </p:extLst>
   </p:cSld>
@@ -3558,7 +3716,7 @@
           <p:cNvPr id="2" name="Content Placeholder 1">
             <a:extLst>
               <a:ext uri="{FF2B5EF4-FFF2-40B4-BE49-F238E27FC236}">
-                <a16:creationId xmlns:a16="http://schemas.microsoft.com/office/drawing/2014/main" id="{6DAFEEE1-BC1E-B2E5-247B-0CAADA1B3ACC}"/>
+                <a16:creationId xmlns:a16="http://schemas.microsoft.com/office/drawing/2014/main" id="{32634000-35A5-37B3-A1C6-4CD9DF196DEE}"/>
               </a:ext>
             </a:extLst>
           </p:cNvPr>
@@ -3574,6 +3732,13 @@
           <a:bodyPr/>
           <a:lstStyle/>
           <a:p>
+            <a:r>
+              <a:rPr lang="en-US" dirty="0"/>
+              <a:t>Some of the functions that must be achieved in the stack:</a:t>
+            </a:r>
+          </a:p>
+          <a:p>
+            <a:pPr lvl="1"/>
             <a:r>
               <a:rPr lang="en-US" dirty="0">
                 <a:solidFill>
@@ -3582,38 +3747,26 @@
                   </a:schemeClr>
                 </a:solidFill>
               </a:rPr>
-              <a:t>Offloading functionality to the cloud</a:t>
+              <a:t>Reading raw data</a:t>
+            </a:r>
+            <a:endParaRPr lang="en-US" dirty="0"/>
+          </a:p>
+          <a:p>
+            <a:pPr lvl="2"/>
+            <a:r>
+              <a:rPr lang="en-US" dirty="0"/>
+              <a:t>The lowest level of the stack is a software driver to read the raw data.</a:t>
+            </a:r>
+          </a:p>
+          <a:p>
+            <a:pPr lvl="2"/>
+            <a:r>
+              <a:rPr lang="en-US" dirty="0"/>
+              <a:t>The period frequency is a parameter that will influence both the processor load and the accuracy of the created representation.</a:t>
             </a:r>
           </a:p>
           <a:p>
             <a:pPr lvl="1"/>
-            <a:r>
-              <a:rPr lang="en-US" dirty="0"/>
-              <a:t>Some tasks (like route calculation or image recognition) can be handled partly on the device and partly in the cloud, where there's more power and storage.</a:t>
-            </a:r>
-          </a:p>
-          <a:p>
-            <a:pPr lvl="1"/>
-            <a:r>
-              <a:rPr lang="en-US" dirty="0"/>
-              <a:t>The architect must determine:</a:t>
-            </a:r>
-          </a:p>
-          <a:p>
-            <a:pPr lvl="2"/>
-            <a:r>
-              <a:rPr lang="en-US" dirty="0"/>
-              <a:t>Decide what stays local and what goes to the cloud.</a:t>
-            </a:r>
-          </a:p>
-          <a:p>
-            <a:pPr lvl="2"/>
-            <a:r>
-              <a:rPr lang="en-US" dirty="0"/>
-              <a:t>Consider device power, network reliability, latency, local storage, and privacy.</a:t>
-            </a:r>
-          </a:p>
-          <a:p>
             <a:r>
               <a:rPr lang="en-US" dirty="0">
                 <a:solidFill>
@@ -3622,55 +3775,14 @@
                   </a:schemeClr>
                 </a:solidFill>
               </a:rPr>
-              <a:t>Shutting down functions depending on the mode of operations</a:t>
-            </a:r>
-          </a:p>
-          <a:p>
-            <a:pPr lvl="1"/>
-            <a:r>
-              <a:rPr lang="en-US" dirty="0"/>
-              <a:t>When certain features aren’t needed; they should be turned off or scaled down to save resources.</a:t>
-            </a:r>
-          </a:p>
-          <a:p>
-            <a:r>
-              <a:rPr lang="en-US" dirty="0">
-                <a:solidFill>
-                  <a:schemeClr val="accent4">
-                    <a:lumMod val="50000"/>
-                  </a:schemeClr>
-                </a:solidFill>
-              </a:rPr>
-              <a:t>Strategy for displaying information</a:t>
-            </a:r>
-          </a:p>
-          <a:p>
-            <a:pPr lvl="1"/>
-            <a:r>
-              <a:rPr lang="en-US" dirty="0"/>
-              <a:t>This issue is tied to available display resolution. </a:t>
-            </a:r>
-          </a:p>
-          <a:p>
-            <a:pPr lvl="1"/>
-            <a:r>
-              <a:rPr lang="en-US" dirty="0"/>
-              <a:t>Low resolution (e.g., 320×320): Requires minimizing</a:t>
-            </a:r>
-            <a:r>
-              <a:rPr lang="en-US" b="1" dirty="0"/>
-              <a:t> </a:t>
-            </a:r>
-            <a:r>
-              <a:rPr lang="en-US" dirty="0"/>
-              <a:t>the information on the display.</a:t>
-            </a:r>
-          </a:p>
-          <a:p>
-            <a:pPr lvl="1"/>
-            <a:r>
-              <a:rPr lang="en-US" dirty="0"/>
-              <a:t>High resolution (e.g., 1280×720): Can show richer, more detailed displays</a:t>
+              <a:t>Smoothing data</a:t>
+            </a:r>
+          </a:p>
+          <a:p>
+            <a:pPr lvl="2"/>
+            <a:r>
+              <a:rPr lang="en-US" dirty="0"/>
+              <a:t>Raw data usually has a great deal of noise or variation.</a:t>
             </a:r>
             <a:endParaRPr lang="en-US" dirty="0">
               <a:solidFill>
@@ -3680,6 +3792,81 @@
               </a:solidFill>
             </a:endParaRPr>
           </a:p>
+          <a:p>
+            <a:pPr lvl="2"/>
+            <a:r>
+              <a:rPr lang="en-US" dirty="0"/>
+              <a:t>Smoothing techniques take multiple readings over time to create a more reliable result.</a:t>
+            </a:r>
+            <a:endParaRPr lang="en-US" b="1" dirty="0">
+              <a:solidFill>
+                <a:schemeClr val="accent4">
+                  <a:lumMod val="50000"/>
+                </a:schemeClr>
+              </a:solidFill>
+            </a:endParaRPr>
+          </a:p>
+          <a:p>
+            <a:pPr lvl="1"/>
+            <a:r>
+              <a:rPr lang="en-US" dirty="0">
+                <a:solidFill>
+                  <a:schemeClr val="accent4">
+                    <a:lumMod val="50000"/>
+                  </a:schemeClr>
+                </a:solidFill>
+              </a:rPr>
+              <a:t>Converting Data</a:t>
+            </a:r>
+          </a:p>
+          <a:p>
+            <a:pPr lvl="2"/>
+            <a:r>
+              <a:rPr lang="en-US" dirty="0"/>
+              <a:t>Different sensors might measure the same thing but report it in different formats.</a:t>
+            </a:r>
+          </a:p>
+          <a:p>
+            <a:pPr lvl="2"/>
+            <a:r>
+              <a:rPr lang="en-US" dirty="0"/>
+              <a:t>The system must standardize these readings.</a:t>
+            </a:r>
+          </a:p>
+          <a:p>
+            <a:pPr lvl="1"/>
+            <a:r>
+              <a:rPr lang="en-US" dirty="0">
+                <a:solidFill>
+                  <a:schemeClr val="accent4">
+                    <a:lumMod val="50000"/>
+                  </a:schemeClr>
+                </a:solidFill>
+              </a:rPr>
+              <a:t>Sensor Fusion</a:t>
+            </a:r>
+          </a:p>
+          <a:p>
+            <a:pPr lvl="2"/>
+            <a:r>
+              <a:rPr lang="en-US" dirty="0"/>
+              <a:t>No single sensor gives the full picture. </a:t>
+            </a:r>
+          </a:p>
+          <a:p>
+            <a:pPr lvl="2"/>
+            <a:r>
+              <a:rPr lang="en-US" dirty="0"/>
+              <a:t>Sensor fusion means combining data from multiple different sensors to get a better understanding.</a:t>
+            </a:r>
+            <a:endParaRPr lang="en-US" dirty="0">
+              <a:solidFill>
+                <a:schemeClr val="accent4">
+                  <a:lumMod val="50000"/>
+                </a:schemeClr>
+              </a:solidFill>
+            </a:endParaRPr>
+          </a:p>
         </p:txBody>
       </p:sp>
       <p:sp>
@@ -3687,7 +3874,7 @@
           <p:cNvPr id="3" name="Title 2">
             <a:extLst>
               <a:ext uri="{FF2B5EF4-FFF2-40B4-BE49-F238E27FC236}">
-                <a16:creationId xmlns:a16="http://schemas.microsoft.com/office/drawing/2014/main" id="{DC3EE9A7-7A27-6BF5-A031-2DDCC4C5F2EA}"/>
+                <a16:creationId xmlns:a16="http://schemas.microsoft.com/office/drawing/2014/main" id="{1111DF01-69C9-0AB5-E6C1-BAFC5D212943}"/>
               </a:ext>
             </a:extLst>
           </p:cNvPr>
@@ -3705,7 +3892,7 @@
           <a:p>
             <a:r>
               <a:rPr lang="en-US" dirty="0"/>
-              <a:t>18.4 Resources</a:t>
+              <a:t>18.3 Sensors and Actuators</a:t>
             </a:r>
           </a:p>
         </p:txBody>
@@ -3715,7 +3902,7 @@
           <p:cNvPr id="4" name="Slide Number Placeholder 3">
             <a:extLst>
               <a:ext uri="{FF2B5EF4-FFF2-40B4-BE49-F238E27FC236}">
-                <a16:creationId xmlns:a16="http://schemas.microsoft.com/office/drawing/2014/main" id="{EDA587DF-480C-3B03-DD9D-8552CF9DDC4B}"/>
+                <a16:creationId xmlns:a16="http://schemas.microsoft.com/office/drawing/2014/main" id="{74686158-9B89-7BD9-A038-87689619DBCB}"/>
               </a:ext>
             </a:extLst>
           </p:cNvPr>
@@ -3743,7 +3930,7 @@
     </p:spTree>
     <p:extLst>
       <p:ext uri="{BB962C8B-B14F-4D97-AF65-F5344CB8AC3E}">
-        <p14:creationId xmlns:p14="http://schemas.microsoft.com/office/powerpoint/2010/main" val="366334930"/>
+        <p14:creationId xmlns:p14="http://schemas.microsoft.com/office/powerpoint/2010/main" val="4038948653"/>
       </p:ext>
     </p:extLst>
   </p:cSld>
@@ -3775,7 +3962,7 @@
           <p:cNvPr id="2" name="Content Placeholder 1">
             <a:extLst>
               <a:ext uri="{FF2B5EF4-FFF2-40B4-BE49-F238E27FC236}">
-                <a16:creationId xmlns:a16="http://schemas.microsoft.com/office/drawing/2014/main" id="{FF2690B3-611D-0F70-0F9B-E0FFB08CADD3}"/>
+                <a16:creationId xmlns:a16="http://schemas.microsoft.com/office/drawing/2014/main" id="{53EC2AEC-BA4A-01B0-D6BE-C11C969DA5A0}"/>
               </a:ext>
             </a:extLst>
           </p:cNvPr>
@@ -3786,67 +3973,31 @@
             <p:ph sz="half" idx="2"/>
           </p:nvPr>
         </p:nvSpPr>
-        <p:spPr>
-          <a:xfrm>
-            <a:off x="556149" y="1028082"/>
-            <a:ext cx="11058526" cy="5676247"/>
-          </a:xfrm>
-        </p:spPr>
+        <p:spPr/>
         <p:txBody>
           <a:bodyPr/>
           <a:lstStyle/>
           <a:p>
             <a:r>
               <a:rPr lang="en-US" dirty="0"/>
-              <a:t>Mobile systems (like smartphones, cars, drones, etc.) have special or unusual traits in their development and maintenance processes.</a:t>
-            </a:r>
-          </a:p>
-          <a:p>
-            <a:pPr lvl="1"/>
-            <a:r>
-              <a:rPr lang="en-US" dirty="0"/>
-              <a:t>Architects must adapt their decisions accordingly.</a:t>
-            </a:r>
-            <a:endParaRPr lang="fa-IR" dirty="0"/>
-          </a:p>
-          <a:p>
-            <a:r>
-              <a:rPr lang="en-US" dirty="0"/>
-              <a:t>The architect must be concerned with the </a:t>
-            </a:r>
-          </a:p>
-          <a:p>
-            <a:pPr lvl="1"/>
-            <a:r>
-              <a:rPr lang="en-US" dirty="0"/>
-              <a:t>hardware choices</a:t>
-            </a:r>
-          </a:p>
-          <a:p>
-            <a:pPr lvl="1"/>
-            <a:r>
-              <a:rPr lang="en-US" dirty="0"/>
-              <a:t>Testing</a:t>
-            </a:r>
-          </a:p>
-          <a:p>
-            <a:pPr lvl="1"/>
-            <a:r>
-              <a:rPr lang="en-US" dirty="0"/>
-              <a:t>deploying updates</a:t>
-            </a:r>
-          </a:p>
-          <a:p>
-            <a:pPr lvl="1"/>
-            <a:r>
-              <a:rPr lang="en-US" dirty="0"/>
-              <a:t>logging</a:t>
-            </a:r>
-          </a:p>
-          <a:p>
-            <a:pPr lvl="1" indent="0">
-              <a:buNone/>
-            </a:pPr>
+              <a:t>An architect must make a number of important decisions surrounding resources and their usage:</a:t>
+            </a:r>
+          </a:p>
+          <a:p>
+            <a:r>
+              <a:rPr lang="en-US" dirty="0">
+                <a:solidFill>
+                  <a:schemeClr val="accent4">
+                    <a:lumMod val="50000"/>
+                  </a:schemeClr>
+                </a:solidFill>
+              </a:rPr>
+              <a:t>Assigning tasks to electronic control units </a:t>
+            </a:r>
+            <a:r>
+              <a:rPr lang="en-US" dirty="0"/>
+              <a:t>(ECUs)</a:t>
+            </a:r>
             <a:endParaRPr lang="en-US" dirty="0">
               <a:solidFill>
                 <a:schemeClr val="accent4">
@@ -3855,6 +4006,86 @@
               </a:solidFill>
             </a:endParaRPr>
           </a:p>
+          <a:p>
+            <a:pPr lvl="1"/>
+            <a:r>
+              <a:rPr lang="en-US" dirty="0"/>
+              <a:t>Larger mobile systems (like cars or planes) have multiple ECUs (small computers), and the architect must decide which software tasks go to which ECU.</a:t>
+            </a:r>
+          </a:p>
+          <a:p>
+            <a:pPr lvl="1"/>
+            <a:r>
+              <a:rPr lang="en-US" b="1" dirty="0"/>
+              <a:t>Fit of the ECU to the function: </a:t>
+            </a:r>
+            <a:r>
+              <a:rPr lang="en-US" dirty="0"/>
+              <a:t>Put functions on ECUs powerful enough to handle them.</a:t>
+            </a:r>
+          </a:p>
+          <a:p>
+            <a:pPr lvl="1"/>
+            <a:r>
+              <a:rPr lang="en-US" b="1" dirty="0"/>
+              <a:t>Criticality: </a:t>
+            </a:r>
+            <a:r>
+              <a:rPr lang="en-US" dirty="0"/>
+              <a:t>More powerful ECUs may be reserved for critical functions.</a:t>
+            </a:r>
+          </a:p>
+          <a:p>
+            <a:pPr lvl="1"/>
+            <a:r>
+              <a:rPr lang="en-US" b="1" dirty="0"/>
+              <a:t>Location in the vehicle: </a:t>
+            </a:r>
+            <a:r>
+              <a:rPr lang="en-US" dirty="0"/>
+              <a:t>Sometimes, location matters—e.g., First-class passengers may have better Wi-Fi connectivity than second-class passengers.</a:t>
+            </a:r>
+          </a:p>
+          <a:p>
+            <a:pPr lvl="1"/>
+            <a:r>
+              <a:rPr lang="en-US" b="1" dirty="0"/>
+              <a:t>Connectivity: </a:t>
+            </a:r>
+            <a:r>
+              <a:rPr lang="en-US" dirty="0"/>
+              <a:t>If a function is split across ECUs, they must be able to communicate easily over the internal network.</a:t>
+            </a:r>
+          </a:p>
+          <a:p>
+            <a:pPr lvl="1"/>
+            <a:r>
+              <a:rPr lang="en-US" b="1" dirty="0"/>
+              <a:t>Locality of Communication: </a:t>
+            </a:r>
+            <a:r>
+              <a:rPr lang="en-US" dirty="0"/>
+              <a:t>Functions that talk to each other a lot should be on the same ECU to reduce communication delays and traffic.</a:t>
+            </a:r>
+          </a:p>
+          <a:p>
+            <a:pPr lvl="1"/>
+            <a:r>
+              <a:rPr lang="en-US" b="1" dirty="0"/>
+              <a:t>Cost:</a:t>
+            </a:r>
+            <a:r>
+              <a:rPr lang="en-US" dirty="0"/>
+              <a:t> Typically, a manufacturer wants to minimize the number of ECUs deployed.</a:t>
+            </a:r>
+            <a:endParaRPr lang="en-US" b="1" dirty="0">
+              <a:solidFill>
+                <a:schemeClr val="accent4">
+                  <a:lumMod val="50000"/>
+                </a:schemeClr>
+              </a:solidFill>
+            </a:endParaRPr>
+          </a:p>
         </p:txBody>
       </p:sp>
       <p:sp>
@@ -3862,7 +4093,7 @@
           <p:cNvPr id="3" name="Title 2">
             <a:extLst>
               <a:ext uri="{FF2B5EF4-FFF2-40B4-BE49-F238E27FC236}">
-                <a16:creationId xmlns:a16="http://schemas.microsoft.com/office/drawing/2014/main" id="{7E541944-9579-1EE5-AF18-E0627D0A86FD}"/>
+                <a16:creationId xmlns:a16="http://schemas.microsoft.com/office/drawing/2014/main" id="{E0A11556-B073-9361-6161-AF69F9369213}"/>
               </a:ext>
             </a:extLst>
           </p:cNvPr>
@@ -3875,14 +4106,12 @@
         </p:nvSpPr>
         <p:spPr/>
         <p:txBody>
-          <a:bodyPr>
-            <a:normAutofit/>
-          </a:bodyPr>
+          <a:bodyPr/>
           <a:lstStyle/>
           <a:p>
             <a:r>
               <a:rPr lang="en-US" dirty="0"/>
-              <a:t>18.5 Life Cycle</a:t>
+              <a:t>18.4 Resources</a:t>
             </a:r>
           </a:p>
         </p:txBody>
@@ -3892,7 +4121,7 @@
           <p:cNvPr id="4" name="Slide Number Placeholder 3">
             <a:extLst>
               <a:ext uri="{FF2B5EF4-FFF2-40B4-BE49-F238E27FC236}">
-                <a16:creationId xmlns:a16="http://schemas.microsoft.com/office/drawing/2014/main" id="{45D181D7-BB9D-3226-BD24-EC3FDB707265}"/>
+                <a16:creationId xmlns:a16="http://schemas.microsoft.com/office/drawing/2014/main" id="{B35AFF80-04B8-FB36-4289-BD2F7670C21E}"/>
               </a:ext>
             </a:extLst>
           </p:cNvPr>
@@ -3920,7 +4149,7 @@
     </p:spTree>
     <p:extLst>
       <p:ext uri="{BB962C8B-B14F-4D97-AF65-F5344CB8AC3E}">
-        <p14:creationId xmlns:p14="http://schemas.microsoft.com/office/powerpoint/2010/main" val="1138615448"/>
+        <p14:creationId xmlns:p14="http://schemas.microsoft.com/office/powerpoint/2010/main" val="2295808854"/>
       </p:ext>
     </p:extLst>
   </p:cSld>
@@ -3952,7 +4181,7 @@
           <p:cNvPr id="2" name="Content Placeholder 1">
             <a:extLst>
               <a:ext uri="{FF2B5EF4-FFF2-40B4-BE49-F238E27FC236}">
-                <a16:creationId xmlns:a16="http://schemas.microsoft.com/office/drawing/2014/main" id="{B004E3D0-3146-2477-D843-D8F306D9715D}"/>
+                <a16:creationId xmlns:a16="http://schemas.microsoft.com/office/drawing/2014/main" id="{6DAFEEE1-BC1E-B2E5-247B-0CAADA1B3ACC}"/>
               </a:ext>
             </a:extLst>
           </p:cNvPr>
@@ -3963,39 +4192,116 @@
             <p:ph sz="half" idx="2"/>
           </p:nvPr>
         </p:nvSpPr>
-        <p:spPr>
-          <a:xfrm>
-            <a:off x="588977" y="1015164"/>
-            <a:ext cx="11058526" cy="5676247"/>
-          </a:xfrm>
-        </p:spPr>
+        <p:spPr/>
         <p:txBody>
           <a:bodyPr/>
           <a:lstStyle/>
           <a:p>
             <a:r>
-              <a:rPr lang="en-US" dirty="0"/>
-              <a:t>In mobile systems, hardware is often selected before software design begins, which means the software must adapt to hardware constraints.</a:t>
-            </a:r>
-          </a:p>
-          <a:p>
-            <a:r>
-              <a:rPr lang="en-US" dirty="0"/>
-              <a:t>Hardware choices are usually made by management, sales teams, or regulatory and their goal is mostly to minimize risk (e.g., cost, legal compliance), not to optimize software quality.</a:t>
-            </a:r>
-          </a:p>
-          <a:p>
+              <a:rPr lang="en-US" dirty="0">
+                <a:solidFill>
+                  <a:schemeClr val="accent4">
+                    <a:lumMod val="50000"/>
+                  </a:schemeClr>
+                </a:solidFill>
+              </a:rPr>
+              <a:t>Offloading functionality to the cloud</a:t>
+            </a:r>
+          </a:p>
+          <a:p>
+            <a:pPr lvl="1"/>
+            <a:r>
+              <a:rPr lang="en-US" dirty="0"/>
+              <a:t>Some tasks (like route calculation or image recognition) can be handled partly on the device and partly in the cloud, where there's more power and storage.</a:t>
+            </a:r>
+          </a:p>
+          <a:p>
+            <a:pPr lvl="1"/>
+            <a:r>
+              <a:rPr lang="en-US" dirty="0"/>
+              <a:t>The architect must determine:</a:t>
+            </a:r>
+          </a:p>
+          <a:p>
+            <a:pPr lvl="2"/>
+            <a:r>
+              <a:rPr lang="en-US" dirty="0"/>
+              <a:t>Decide what stays local and what goes to the cloud.</a:t>
+            </a:r>
+          </a:p>
+          <a:p>
+            <a:pPr lvl="2"/>
+            <a:r>
+              <a:rPr lang="en-US" dirty="0"/>
+              <a:t>Consider device power, network reliability, latency, local storage, and privacy.</a:t>
+            </a:r>
+          </a:p>
+          <a:p>
+            <a:r>
+              <a:rPr lang="en-US" dirty="0">
+                <a:solidFill>
+                  <a:schemeClr val="accent4">
+                    <a:lumMod val="50000"/>
+                  </a:schemeClr>
+                </a:solidFill>
+              </a:rPr>
+              <a:t>Shutting down functions depending on the mode of operations</a:t>
+            </a:r>
+          </a:p>
+          <a:p>
+            <a:pPr lvl="1"/>
+            <a:r>
+              <a:rPr lang="en-US" dirty="0"/>
+              <a:t>When certain features aren’t needed; they should be turned off or scaled down to save resources.</a:t>
+            </a:r>
+          </a:p>
+          <a:p>
+            <a:r>
+              <a:rPr lang="en-US" dirty="0">
+                <a:solidFill>
+                  <a:schemeClr val="accent4">
+                    <a:lumMod val="50000"/>
+                  </a:schemeClr>
+                </a:solidFill>
+              </a:rPr>
+              <a:t>Strategy for displaying information</a:t>
+            </a:r>
+          </a:p>
+          <a:p>
+            <a:pPr lvl="1"/>
+            <a:r>
+              <a:rPr lang="en-US" dirty="0"/>
+              <a:t>This issue is tied to available display resolution. </a:t>
+            </a:r>
+          </a:p>
+          <a:p>
+            <a:pPr lvl="1"/>
+            <a:r>
+              <a:rPr lang="en-US" dirty="0"/>
+              <a:t>Low resolution (e.g., 320×320): Requires minimizing</a:t>
+            </a:r>
             <a:r>
               <a:rPr lang="en-US" b="1" dirty="0"/>
-              <a:t>Advice to architects:</a:t>
+              <a:t> </a:t>
+            </a:r>
+            <a:r>
+              <a:rPr lang="en-US" dirty="0"/>
+              <a:t>the information on the display.</a:t>
             </a:r>
           </a:p>
           <a:p>
             <a:pPr lvl="1"/>
             <a:r>
               <a:rPr lang="en-US" dirty="0"/>
-              <a:t>Instead of waiting for these decisions to be handed down, the software architect should participate early in discussions to explain tradeoffs and help guide better choices.</a:t>
-            </a:r>
+              <a:t>High resolution (e.g., 1280×720): Can show richer, more detailed displays</a:t>
+            </a:r>
+            <a:endParaRPr lang="en-US" dirty="0">
+              <a:solidFill>
+                <a:schemeClr val="accent4">
+                  <a:lumMod val="50000"/>
+                </a:schemeClr>
+              </a:solidFill>
+            </a:endParaRPr>
           </a:p>
         </p:txBody>
       </p:sp>
@@ -4004,7 +4310,7 @@
           <p:cNvPr id="3" name="Title 2">
             <a:extLst>
               <a:ext uri="{FF2B5EF4-FFF2-40B4-BE49-F238E27FC236}">
-                <a16:creationId xmlns:a16="http://schemas.microsoft.com/office/drawing/2014/main" id="{EBF84422-56DA-ED5C-CF3F-E3D61FD1018A}"/>
+                <a16:creationId xmlns:a16="http://schemas.microsoft.com/office/drawing/2014/main" id="{DC3EE9A7-7A27-6BF5-A031-2DDCC4C5F2EA}"/>
               </a:ext>
             </a:extLst>
           </p:cNvPr>
@@ -4015,19 +4321,14 @@
             <p:ph type="title"/>
           </p:nvPr>
         </p:nvSpPr>
-        <p:spPr>
-          <a:xfrm>
-            <a:off x="878889" y="153671"/>
-            <a:ext cx="10436810" cy="641281"/>
-          </a:xfrm>
-        </p:spPr>
+        <p:spPr/>
         <p:txBody>
           <a:bodyPr/>
           <a:lstStyle/>
           <a:p>
             <a:r>
               <a:rPr lang="en-US" dirty="0"/>
-              <a:t>Hardware First</a:t>
+              <a:t>18.4 Resources</a:t>
             </a:r>
           </a:p>
         </p:txBody>
@@ -4037,7 +4338,7 @@
           <p:cNvPr id="4" name="Slide Number Placeholder 3">
             <a:extLst>
               <a:ext uri="{FF2B5EF4-FFF2-40B4-BE49-F238E27FC236}">
-                <a16:creationId xmlns:a16="http://schemas.microsoft.com/office/drawing/2014/main" id="{BD27A0DA-7DC9-3BC7-D734-53ED0DFF036A}"/>
+                <a16:creationId xmlns:a16="http://schemas.microsoft.com/office/drawing/2014/main" id="{EDA587DF-480C-3B03-DD9D-8552CF9DDC4B}"/>
               </a:ext>
             </a:extLst>
           </p:cNvPr>
@@ -4048,12 +4349,7 @@
             <p:ph type="sldNum" sz="quarter" idx="10"/>
           </p:nvPr>
         </p:nvSpPr>
-        <p:spPr>
-          <a:xfrm>
-            <a:off x="556149" y="153671"/>
-            <a:ext cx="670079" cy="641281"/>
-          </a:xfrm>
-        </p:spPr>
+        <p:spPr/>
         <p:txBody>
           <a:bodyPr/>
           <a:lstStyle/>
@@ -4070,7 +4366,7 @@
     </p:spTree>
     <p:extLst>
       <p:ext uri="{BB962C8B-B14F-4D97-AF65-F5344CB8AC3E}">
-        <p14:creationId xmlns:p14="http://schemas.microsoft.com/office/powerpoint/2010/main" val="1171964221"/>
+        <p14:creationId xmlns:p14="http://schemas.microsoft.com/office/powerpoint/2010/main" val="366334930"/>
       </p:ext>
     </p:extLst>
   </p:cSld>
@@ -4102,7 +4398,7 @@
           <p:cNvPr id="2" name="Content Placeholder 1">
             <a:extLst>
               <a:ext uri="{FF2B5EF4-FFF2-40B4-BE49-F238E27FC236}">
-                <a16:creationId xmlns:a16="http://schemas.microsoft.com/office/drawing/2014/main" id="{87AC8C5B-BDAA-35ED-4CE0-1AE2F191DCA4}"/>
+                <a16:creationId xmlns:a16="http://schemas.microsoft.com/office/drawing/2014/main" id="{FF2690B3-611D-0F70-0F9B-E0FFB08CADD3}"/>
               </a:ext>
             </a:extLst>
           </p:cNvPr>
@@ -4113,49 +4409,67 @@
             <p:ph sz="half" idx="2"/>
           </p:nvPr>
         </p:nvSpPr>
-        <p:spPr/>
+        <p:spPr>
+          <a:xfrm>
+            <a:off x="556149" y="1028082"/>
+            <a:ext cx="11058526" cy="5676247"/>
+          </a:xfrm>
+        </p:spPr>
         <p:txBody>
           <a:bodyPr/>
           <a:lstStyle/>
           <a:p>
             <a:r>
               <a:rPr lang="en-US" dirty="0"/>
-              <a:t>Mobile devices present some unique considerations for testing</a:t>
+              <a:t>Mobile systems (like smartphones, cars, drones, etc.) have special or unusual traits in their development and maintenance processes.</a:t>
             </a:r>
           </a:p>
           <a:p>
             <a:pPr lvl="1"/>
             <a:r>
-              <a:rPr lang="en-US" dirty="0">
-                <a:solidFill>
-                  <a:schemeClr val="accent4">
-                    <a:lumMod val="50000"/>
-                  </a:schemeClr>
-                </a:solidFill>
-              </a:rPr>
-              <a:t>Test display layouts</a:t>
-            </a:r>
-          </a:p>
-          <a:p>
-            <a:pPr lvl="2"/>
-            <a:r>
-              <a:rPr lang="en-US" dirty="0"/>
-              <a:t>Mobile devices come in many different screen sizes and shapes, so it's important to test how the user interface looks and behaves across all of them.</a:t>
-            </a:r>
-          </a:p>
-          <a:p>
-            <a:pPr lvl="2"/>
-            <a:r>
-              <a:rPr lang="en-US" dirty="0"/>
-              <a:t>Automatic layout tools (like HTML/CSS rendering) can fail on very small or unusual screens.</a:t>
-            </a:r>
-          </a:p>
-          <a:p>
-            <a:pPr lvl="2"/>
-            <a:r>
-              <a:rPr lang="en-US" dirty="0"/>
-              <a:t>These problems can be hard to detect unless very thorough and device-specific testing is done.</a:t>
-            </a:r>
+              <a:rPr lang="en-US" dirty="0"/>
+              <a:t>Architects must adapt their decisions accordingly.</a:t>
+            </a:r>
+            <a:endParaRPr lang="fa-IR" dirty="0"/>
+          </a:p>
+          <a:p>
+            <a:r>
+              <a:rPr lang="en-US" dirty="0"/>
+              <a:t>The architect must be concerned with the </a:t>
+            </a:r>
+          </a:p>
+          <a:p>
+            <a:pPr lvl="1"/>
+            <a:r>
+              <a:rPr lang="en-US" dirty="0"/>
+              <a:t>hardware choices</a:t>
+            </a:r>
+          </a:p>
+          <a:p>
+            <a:pPr lvl="1"/>
+            <a:r>
+              <a:rPr lang="en-US" dirty="0"/>
+              <a:t>Testing</a:t>
+            </a:r>
+          </a:p>
+          <a:p>
+            <a:pPr lvl="1"/>
+            <a:r>
+              <a:rPr lang="en-US" dirty="0"/>
+              <a:t>deploying updates</a:t>
+            </a:r>
+          </a:p>
+          <a:p>
+            <a:pPr lvl="1"/>
+            <a:r>
+              <a:rPr lang="en-US" dirty="0"/>
+              <a:t>logging</a:t>
+            </a:r>
+          </a:p>
+          <a:p>
+            <a:pPr lvl="1" indent="0">
+              <a:buNone/>
+            </a:pPr>
             <a:endParaRPr lang="en-US" dirty="0">
               <a:solidFill>
                 <a:schemeClr val="accent4">
@@ -4164,67 +4478,6 @@
               </a:solidFill>
             </a:endParaRPr>
           </a:p>
-          <a:p>
-            <a:pPr lvl="1"/>
-            <a:r>
-              <a:rPr lang="en-US" dirty="0">
-                <a:solidFill>
-                  <a:schemeClr val="accent4">
-                    <a:lumMod val="50000"/>
-                  </a:schemeClr>
-                </a:solidFill>
-              </a:rPr>
-              <a:t>Test operational edge cases</a:t>
-            </a:r>
-          </a:p>
-          <a:p>
-            <a:pPr lvl="2"/>
-            <a:r>
-              <a:rPr lang="en-US" dirty="0"/>
-              <a:t>If the device runs out of battery or suddenly shuts down, the app should Not lose the user’s work or state. And be able to recover gracefully.</a:t>
-            </a:r>
-          </a:p>
-          <a:p>
-            <a:pPr lvl="2"/>
-            <a:r>
-              <a:rPr lang="en-US" dirty="0"/>
-              <a:t>When the user interface does not react correctly, re-creating the sequence of events that caused the problem is difficult</a:t>
-            </a:r>
-          </a:p>
-          <a:p>
-            <a:pPr lvl="4"/>
-            <a:r>
-              <a:rPr lang="en-US" dirty="0"/>
-              <a:t>the problem may depend on the timing, or on a specific set of operations.</a:t>
-            </a:r>
-          </a:p>
-          <a:p>
-            <a:pPr lvl="1"/>
-            <a:r>
-              <a:rPr lang="en-US" dirty="0">
-                <a:solidFill>
-                  <a:schemeClr val="accent4">
-                    <a:lumMod val="50000"/>
-                  </a:schemeClr>
-                </a:solidFill>
-              </a:rPr>
-              <a:t>Test resource usage</a:t>
-            </a:r>
-          </a:p>
-          <a:p>
-            <a:pPr lvl="2"/>
-            <a:r>
-              <a:rPr lang="en-US" dirty="0"/>
-              <a:t>Test how the system uses resources like battery, memory, or CPU.</a:t>
-            </a:r>
-            <a:endParaRPr lang="en-US" dirty="0">
-              <a:solidFill>
-                <a:schemeClr val="accent4">
-                  <a:lumMod val="50000"/>
-                </a:schemeClr>
-              </a:solidFill>
-            </a:endParaRPr>
-          </a:p>
         </p:txBody>
       </p:sp>
       <p:sp>
@@ -4232,7 +4485,7 @@
           <p:cNvPr id="3" name="Title 2">
             <a:extLst>
               <a:ext uri="{FF2B5EF4-FFF2-40B4-BE49-F238E27FC236}">
-                <a16:creationId xmlns:a16="http://schemas.microsoft.com/office/drawing/2014/main" id="{FB46E1F5-C56E-62BA-BA24-56FCF2DDE80F}"/>
+                <a16:creationId xmlns:a16="http://schemas.microsoft.com/office/drawing/2014/main" id="{7E541944-9579-1EE5-AF18-E0627D0A86FD}"/>
               </a:ext>
             </a:extLst>
           </p:cNvPr>
@@ -4245,12 +4498,14 @@
         </p:nvSpPr>
         <p:spPr/>
         <p:txBody>
-          <a:bodyPr/>
+          <a:bodyPr>
+            <a:normAutofit/>
+          </a:bodyPr>
           <a:lstStyle/>
           <a:p>
             <a:r>
               <a:rPr lang="en-US" dirty="0"/>
-              <a:t>Testing</a:t>
+              <a:t>18.5 Life Cycle</a:t>
             </a:r>
           </a:p>
         </p:txBody>
@@ -4260,7 +4515,7 @@
           <p:cNvPr id="4" name="Slide Number Placeholder 3">
             <a:extLst>
               <a:ext uri="{FF2B5EF4-FFF2-40B4-BE49-F238E27FC236}">
-                <a16:creationId xmlns:a16="http://schemas.microsoft.com/office/drawing/2014/main" id="{4E751416-72A6-24DC-7640-87BA7F167D16}"/>
+                <a16:creationId xmlns:a16="http://schemas.microsoft.com/office/drawing/2014/main" id="{45D181D7-BB9D-3226-BD24-EC3FDB707265}"/>
               </a:ext>
             </a:extLst>
           </p:cNvPr>
@@ -4288,7 +4543,7 @@
     </p:spTree>
     <p:extLst>
       <p:ext uri="{BB962C8B-B14F-4D97-AF65-F5344CB8AC3E}">
-        <p14:creationId xmlns:p14="http://schemas.microsoft.com/office/powerpoint/2010/main" val="3150012546"/>
+        <p14:creationId xmlns:p14="http://schemas.microsoft.com/office/powerpoint/2010/main" val="1138615448"/>
       </p:ext>
     </p:extLst>
   </p:cSld>
@@ -4320,7 +4575,7 @@
           <p:cNvPr id="2" name="Content Placeholder 1">
             <a:extLst>
               <a:ext uri="{FF2B5EF4-FFF2-40B4-BE49-F238E27FC236}">
-                <a16:creationId xmlns:a16="http://schemas.microsoft.com/office/drawing/2014/main" id="{3A5E695E-DB7E-5C42-B46B-67C093C2CB37}"/>
+                <a16:creationId xmlns:a16="http://schemas.microsoft.com/office/drawing/2014/main" id="{B004E3D0-3146-2477-D843-D8F306D9715D}"/>
               </a:ext>
             </a:extLst>
           </p:cNvPr>
@@ -4331,145 +4586,39 @@
             <p:ph sz="half" idx="2"/>
           </p:nvPr>
         </p:nvSpPr>
-        <p:spPr/>
+        <p:spPr>
+          <a:xfrm>
+            <a:off x="588977" y="1015164"/>
+            <a:ext cx="11058526" cy="5676247"/>
+          </a:xfrm>
+        </p:spPr>
         <p:txBody>
           <a:bodyPr/>
           <a:lstStyle/>
           <a:p>
+            <a:r>
+              <a:rPr lang="en-US" dirty="0"/>
+              <a:t>In mobile systems, hardware is often selected before software design begins, which means the software must adapt to hardware constraints.</a:t>
+            </a:r>
+          </a:p>
+          <a:p>
+            <a:r>
+              <a:rPr lang="en-US" dirty="0"/>
+              <a:t>Hardware choices are usually made by management, sales teams, or regulatory and their goal is mostly to minimize risk (e.g., cost, legal compliance), not to optimize software quality.</a:t>
+            </a:r>
+          </a:p>
+          <a:p>
+            <a:r>
+              <a:rPr lang="en-US" b="1" dirty="0"/>
+              <a:t>Advice to architects:</a:t>
+            </a:r>
+          </a:p>
+          <a:p>
             <a:pPr lvl="1"/>
             <a:r>
-              <a:rPr lang="en-US" dirty="0">
-                <a:solidFill>
-                  <a:schemeClr val="accent4">
-                    <a:lumMod val="50000"/>
-                  </a:schemeClr>
-                </a:solidFill>
-              </a:rPr>
-              <a:t>Test for network transitions</a:t>
-            </a:r>
-          </a:p>
-          <a:p>
-            <a:pPr lvl="2"/>
-            <a:r>
-              <a:rPr lang="en-US" dirty="0"/>
-              <a:t>The system must handle changing from one network to another (like Wi-Fi to 4G to another Wi-Fi) without disrupting the user experience.</a:t>
-            </a:r>
-          </a:p>
-          <a:p>
-            <a:r>
-              <a:rPr lang="en-US" dirty="0"/>
-              <a:t>Suppose we are testing a car’s lane keep assist function, where the vehicle stays in the lane defined by markings without driver input. Testing of this system may address the following levels:</a:t>
-            </a:r>
-          </a:p>
-          <a:p>
-            <a:pPr lvl="1"/>
-            <a:r>
-              <a:rPr lang="en-US" dirty="0">
-                <a:solidFill>
-                  <a:schemeClr val="accent4">
-                    <a:lumMod val="50000"/>
-                  </a:schemeClr>
-                </a:solidFill>
-              </a:rPr>
-              <a:t>Software component: </a:t>
-            </a:r>
-            <a:r>
-              <a:rPr lang="en-US" dirty="0"/>
-              <a:t>Testing just the individual piece of software (e.g. the lane detection algorithm)</a:t>
-            </a:r>
-            <a:endParaRPr lang="en-US" dirty="0">
-              <a:solidFill>
-                <a:schemeClr val="accent4">
-                  <a:lumMod val="50000"/>
-                </a:schemeClr>
-              </a:solidFill>
-            </a:endParaRPr>
-          </a:p>
-          <a:p>
-            <a:pPr lvl="1"/>
-            <a:r>
-              <a:rPr lang="en-US" dirty="0">
-                <a:solidFill>
-                  <a:schemeClr val="accent4">
-                    <a:lumMod val="50000"/>
-                  </a:schemeClr>
-                </a:solidFill>
-              </a:rPr>
-              <a:t>Function: </a:t>
-            </a:r>
-            <a:r>
-              <a:rPr lang="en-US" dirty="0"/>
-              <a:t>Testing the complete lane keep assist function (which involves multiple software components like mapping, camera inputs, etc.)</a:t>
-            </a:r>
-            <a:endParaRPr lang="en-US" dirty="0">
-              <a:solidFill>
-                <a:schemeClr val="accent4">
-                  <a:lumMod val="50000"/>
-                </a:schemeClr>
-              </a:solidFill>
-            </a:endParaRPr>
-          </a:p>
-          <a:p>
-            <a:pPr lvl="1"/>
-            <a:r>
-              <a:rPr lang="en-US" dirty="0">
-                <a:solidFill>
-                  <a:schemeClr val="accent4">
-                    <a:lumMod val="50000"/>
-                  </a:schemeClr>
-                </a:solidFill>
-              </a:rPr>
-              <a:t>Device: </a:t>
-            </a:r>
-            <a:r>
-              <a:rPr lang="en-US" dirty="0"/>
-              <a:t>Deploying the lane keep assist software onto the actual ECU hardware it will run on.</a:t>
-            </a:r>
-            <a:endParaRPr lang="en-US" dirty="0">
-              <a:solidFill>
-                <a:schemeClr val="accent4">
-                  <a:lumMod val="50000"/>
-                </a:schemeClr>
-              </a:solidFill>
-            </a:endParaRPr>
-          </a:p>
-          <a:p>
-            <a:pPr lvl="1"/>
-            <a:r>
-              <a:rPr lang="en-US" dirty="0">
-                <a:solidFill>
-                  <a:schemeClr val="accent4">
-                    <a:lumMod val="50000"/>
-                  </a:schemeClr>
-                </a:solidFill>
-              </a:rPr>
-              <a:t>System: </a:t>
-            </a:r>
-            <a:r>
-              <a:rPr lang="en-US" dirty="0"/>
-              <a:t>Testing the fully integrated car system.</a:t>
-            </a:r>
-          </a:p>
-          <a:p>
-            <a:r>
-              <a:rPr lang="en-US" dirty="0">
-                <a:solidFill>
-                  <a:schemeClr val="accent1"/>
-                </a:solidFill>
-              </a:rPr>
-              <a:t>Test traceability</a:t>
-            </a:r>
-            <a:r>
-              <a:rPr lang="en-US" dirty="0"/>
-              <a:t>: If an issue is found in step 4, it needs to be reproducible and traceable through all test setups.</a:t>
-            </a:r>
-            <a:endParaRPr lang="en-US" dirty="0">
-              <a:solidFill>
-                <a:schemeClr val="accent4">
-                  <a:lumMod val="50000"/>
-                </a:schemeClr>
-              </a:solidFill>
-            </a:endParaRPr>
+              <a:rPr lang="en-US" dirty="0"/>
+              <a:t>Instead of waiting for these decisions to be handed down, the software architect should participate early in discussions to explain tradeoffs and help guide better choices.</a:t>
+            </a:r>
           </a:p>
         </p:txBody>
       </p:sp>
@@ -4478,7 +4627,7 @@
           <p:cNvPr id="3" name="Title 2">
             <a:extLst>
               <a:ext uri="{FF2B5EF4-FFF2-40B4-BE49-F238E27FC236}">
-                <a16:creationId xmlns:a16="http://schemas.microsoft.com/office/drawing/2014/main" id="{D290AA82-B48B-3AE2-ED69-10889B30ED9E}"/>
+                <a16:creationId xmlns:a16="http://schemas.microsoft.com/office/drawing/2014/main" id="{EBF84422-56DA-ED5C-CF3F-E3D61FD1018A}"/>
               </a:ext>
             </a:extLst>
           </p:cNvPr>
@@ -4489,14 +4638,19 @@
             <p:ph type="title"/>
           </p:nvPr>
         </p:nvSpPr>
-        <p:spPr/>
+        <p:spPr>
+          <a:xfrm>
+            <a:off x="878889" y="153671"/>
+            <a:ext cx="10436810" cy="641281"/>
+          </a:xfrm>
+        </p:spPr>
         <p:txBody>
           <a:bodyPr/>
           <a:lstStyle/>
           <a:p>
             <a:r>
               <a:rPr lang="en-US" dirty="0"/>
-              <a:t>Testing</a:t>
+              <a:t>Hardware First</a:t>
             </a:r>
           </a:p>
         </p:txBody>
@@ -4506,7 +4660,7 @@
           <p:cNvPr id="4" name="Slide Number Placeholder 3">
             <a:extLst>
               <a:ext uri="{FF2B5EF4-FFF2-40B4-BE49-F238E27FC236}">
-                <a16:creationId xmlns:a16="http://schemas.microsoft.com/office/drawing/2014/main" id="{B9034F4C-2260-77B1-3DA7-9EFE19BF156B}"/>
+                <a16:creationId xmlns:a16="http://schemas.microsoft.com/office/drawing/2014/main" id="{BD27A0DA-7DC9-3BC7-D734-53ED0DFF036A}"/>
               </a:ext>
             </a:extLst>
           </p:cNvPr>
@@ -4517,7 +4671,12 @@
             <p:ph type="sldNum" sz="quarter" idx="10"/>
           </p:nvPr>
         </p:nvSpPr>
-        <p:spPr/>
+        <p:spPr>
+          <a:xfrm>
+            <a:off x="556149" y="153671"/>
+            <a:ext cx="670079" cy="641281"/>
+          </a:xfrm>
+        </p:spPr>
         <p:txBody>
           <a:bodyPr/>
           <a:lstStyle/>
@@ -4534,7 +4693,7 @@
     </p:spTree>
     <p:extLst>
       <p:ext uri="{BB962C8B-B14F-4D97-AF65-F5344CB8AC3E}">
-        <p14:creationId xmlns:p14="http://schemas.microsoft.com/office/powerpoint/2010/main" val="1348650789"/>
+        <p14:creationId xmlns:p14="http://schemas.microsoft.com/office/powerpoint/2010/main" val="1171964221"/>
       </p:ext>
     </p:extLst>
   </p:cSld>
@@ -4566,7 +4725,7 @@
           <p:cNvPr id="2" name="Content Placeholder 1">
             <a:extLst>
               <a:ext uri="{FF2B5EF4-FFF2-40B4-BE49-F238E27FC236}">
-                <a16:creationId xmlns:a16="http://schemas.microsoft.com/office/drawing/2014/main" id="{12D54165-E559-8060-B894-097172383734}"/>
+                <a16:creationId xmlns:a16="http://schemas.microsoft.com/office/drawing/2014/main" id="{87AC8C5B-BDAA-35ED-4CE0-1AE2F191DCA4}"/>
               </a:ext>
             </a:extLst>
           </p:cNvPr>
@@ -4582,7 +4741,112 @@
           <a:bodyPr/>
           <a:lstStyle/>
           <a:p>
-            <a:endParaRPr lang="en-US" dirty="0"/>
+            <a:r>
+              <a:rPr lang="en-US" dirty="0"/>
+              <a:t>Mobile devices present some unique considerations for testing</a:t>
+            </a:r>
+          </a:p>
+          <a:p>
+            <a:pPr lvl="1"/>
+            <a:r>
+              <a:rPr lang="en-US" dirty="0">
+                <a:solidFill>
+                  <a:schemeClr val="accent4">
+                    <a:lumMod val="50000"/>
+                  </a:schemeClr>
+                </a:solidFill>
+              </a:rPr>
+              <a:t>Test display layouts</a:t>
+            </a:r>
+          </a:p>
+          <a:p>
+            <a:pPr lvl="2"/>
+            <a:r>
+              <a:rPr lang="en-US" dirty="0"/>
+              <a:t>Mobile devices come in many different screen sizes and shapes, so it's important to test how the user interface looks and behaves across all of them.</a:t>
+            </a:r>
+          </a:p>
+          <a:p>
+            <a:pPr lvl="2"/>
+            <a:r>
+              <a:rPr lang="en-US" dirty="0"/>
+              <a:t>Automatic layout tools (like HTML/CSS rendering) can fail on very small or unusual screens.</a:t>
+            </a:r>
+          </a:p>
+          <a:p>
+            <a:pPr lvl="2"/>
+            <a:r>
+              <a:rPr lang="en-US" dirty="0"/>
+              <a:t>These problems can be hard to detect unless very thorough and device-specific testing is done.</a:t>
+            </a:r>
+            <a:endParaRPr lang="en-US" dirty="0">
+              <a:solidFill>
+                <a:schemeClr val="accent4">
+                  <a:lumMod val="50000"/>
+                </a:schemeClr>
+              </a:solidFill>
+            </a:endParaRPr>
+          </a:p>
+          <a:p>
+            <a:pPr lvl="1"/>
+            <a:r>
+              <a:rPr lang="en-US" dirty="0">
+                <a:solidFill>
+                  <a:schemeClr val="accent4">
+                    <a:lumMod val="50000"/>
+                  </a:schemeClr>
+                </a:solidFill>
+              </a:rPr>
+              <a:t>Test operational edge cases</a:t>
+            </a:r>
+          </a:p>
+          <a:p>
+            <a:pPr lvl="2"/>
+            <a:r>
+              <a:rPr lang="en-US" dirty="0"/>
+              <a:t>If the device runs out of battery or suddenly shuts down, the app should Not lose the user’s work or state. And be able to recover gracefully.</a:t>
+            </a:r>
+          </a:p>
+          <a:p>
+            <a:pPr lvl="2"/>
+            <a:r>
+              <a:rPr lang="en-US" dirty="0"/>
+              <a:t>When the user interface does not react correctly, re-creating the sequence of events that caused the problem is difficult</a:t>
+            </a:r>
+          </a:p>
+          <a:p>
+            <a:pPr lvl="4"/>
+            <a:r>
+              <a:rPr lang="en-US" dirty="0"/>
+              <a:t>the problem may depend on the timing, or on a specific set of operations.</a:t>
+            </a:r>
+          </a:p>
+          <a:p>
+            <a:pPr lvl="1"/>
+            <a:r>
+              <a:rPr lang="en-US" dirty="0">
+                <a:solidFill>
+                  <a:schemeClr val="accent4">
+                    <a:lumMod val="50000"/>
+                  </a:schemeClr>
+                </a:solidFill>
+              </a:rPr>
+              <a:t>Test resource usage</a:t>
+            </a:r>
+          </a:p>
+          <a:p>
+            <a:pPr lvl="2"/>
+            <a:r>
+              <a:rPr lang="en-US" dirty="0"/>
+              <a:t>Test how the system uses resources like battery, memory, or CPU.</a:t>
+            </a:r>
+            <a:endParaRPr lang="en-US" dirty="0">
+              <a:solidFill>
+                <a:schemeClr val="accent4">
+                  <a:lumMod val="50000"/>
+                </a:schemeClr>
+              </a:solidFill>
+            </a:endParaRPr>
           </a:p>
         </p:txBody>
       </p:sp>
@@ -4591,7 +4855,7 @@
           <p:cNvPr id="3" name="Title 2">
             <a:extLst>
               <a:ext uri="{FF2B5EF4-FFF2-40B4-BE49-F238E27FC236}">
-                <a16:creationId xmlns:a16="http://schemas.microsoft.com/office/drawing/2014/main" id="{6646740C-EACF-AF71-37AB-B4B32BF4E893}"/>
+                <a16:creationId xmlns:a16="http://schemas.microsoft.com/office/drawing/2014/main" id="{FB46E1F5-C56E-62BA-BA24-56FCF2DDE80F}"/>
               </a:ext>
             </a:extLst>
           </p:cNvPr>
@@ -4609,7 +4873,7 @@
           <a:p>
             <a:r>
               <a:rPr lang="en-US" dirty="0"/>
-              <a:t>Deploying Updates</a:t>
+              <a:t>Testing</a:t>
             </a:r>
           </a:p>
         </p:txBody>
@@ -4619,7 +4883,7 @@
           <p:cNvPr id="4" name="Slide Number Placeholder 3">
             <a:extLst>
               <a:ext uri="{FF2B5EF4-FFF2-40B4-BE49-F238E27FC236}">
-                <a16:creationId xmlns:a16="http://schemas.microsoft.com/office/drawing/2014/main" id="{5AB65DAD-BBFE-5FF7-105F-7014FC846C43}"/>
+                <a16:creationId xmlns:a16="http://schemas.microsoft.com/office/drawing/2014/main" id="{4E751416-72A6-24DC-7640-87BA7F167D16}"/>
               </a:ext>
             </a:extLst>
           </p:cNvPr>
@@ -4647,7 +4911,7 @@
     </p:spTree>
     <p:extLst>
       <p:ext uri="{BB962C8B-B14F-4D97-AF65-F5344CB8AC3E}">
-        <p14:creationId xmlns:p14="http://schemas.microsoft.com/office/powerpoint/2010/main" val="517065085"/>
+        <p14:creationId xmlns:p14="http://schemas.microsoft.com/office/powerpoint/2010/main" val="3150012546"/>
       </p:ext>
     </p:extLst>
   </p:cSld>
@@ -4679,7 +4943,7 @@
           <p:cNvPr id="2" name="Content Placeholder 1">
             <a:extLst>
               <a:ext uri="{FF2B5EF4-FFF2-40B4-BE49-F238E27FC236}">
-                <a16:creationId xmlns:a16="http://schemas.microsoft.com/office/drawing/2014/main" id="{B45E60EB-F59B-9689-3EDE-E38FA4346761}"/>
+                <a16:creationId xmlns:a16="http://schemas.microsoft.com/office/drawing/2014/main" id="{3A5E695E-DB7E-5C42-B46B-67C093C2CB37}"/>
               </a:ext>
             </a:extLst>
           </p:cNvPr>
@@ -4695,7 +4959,140 @@
           <a:bodyPr/>
           <a:lstStyle/>
           <a:p>
-            <a:endParaRPr lang="en-US"/>
+            <a:pPr lvl="1"/>
+            <a:r>
+              <a:rPr lang="en-US" dirty="0">
+                <a:solidFill>
+                  <a:schemeClr val="accent4">
+                    <a:lumMod val="50000"/>
+                  </a:schemeClr>
+                </a:solidFill>
+              </a:rPr>
+              <a:t>Test for network transitions</a:t>
+            </a:r>
+          </a:p>
+          <a:p>
+            <a:pPr lvl="2"/>
+            <a:r>
+              <a:rPr lang="en-US" dirty="0"/>
+              <a:t>The system must handle changing from one network to another (like Wi-Fi to 4G to another Wi-Fi) without disrupting the user experience.</a:t>
+            </a:r>
+          </a:p>
+          <a:p>
+            <a:r>
+              <a:rPr lang="en-US" dirty="0"/>
+              <a:t>Suppose we are testing a car’s lane keep assist function, where the vehicle stays in the lane defined by markings without driver input. Testing of this system may address the following levels:</a:t>
+            </a:r>
+          </a:p>
+          <a:p>
+            <a:pPr lvl="1"/>
+            <a:r>
+              <a:rPr lang="en-US" dirty="0">
+                <a:solidFill>
+                  <a:schemeClr val="accent4">
+                    <a:lumMod val="50000"/>
+                  </a:schemeClr>
+                </a:solidFill>
+              </a:rPr>
+              <a:t>Software component: </a:t>
+            </a:r>
+            <a:r>
+              <a:rPr lang="en-US" dirty="0"/>
+              <a:t>Testing just the individual piece of software (e.g. the lane detection algorithm)</a:t>
+            </a:r>
+            <a:endParaRPr lang="en-US" dirty="0">
+              <a:solidFill>
+                <a:schemeClr val="accent4">
+                  <a:lumMod val="50000"/>
+                </a:schemeClr>
+              </a:solidFill>
+            </a:endParaRPr>
+          </a:p>
+          <a:p>
+            <a:pPr lvl="1"/>
+            <a:r>
+              <a:rPr lang="en-US" dirty="0">
+                <a:solidFill>
+                  <a:schemeClr val="accent4">
+                    <a:lumMod val="50000"/>
+                  </a:schemeClr>
+                </a:solidFill>
+              </a:rPr>
+              <a:t>Function: </a:t>
+            </a:r>
+            <a:r>
+              <a:rPr lang="en-US" dirty="0"/>
+              <a:t>Testing the complete lane keep assist function (which involves multiple software components like mapping, camera inputs, etc.)</a:t>
+            </a:r>
+            <a:endParaRPr lang="en-US" dirty="0">
+              <a:solidFill>
+                <a:schemeClr val="accent4">
+                  <a:lumMod val="50000"/>
+                </a:schemeClr>
+              </a:solidFill>
+            </a:endParaRPr>
+          </a:p>
+          <a:p>
+            <a:pPr lvl="1"/>
+            <a:r>
+              <a:rPr lang="en-US" dirty="0">
+                <a:solidFill>
+                  <a:schemeClr val="accent4">
+                    <a:lumMod val="50000"/>
+                  </a:schemeClr>
+                </a:solidFill>
+              </a:rPr>
+              <a:t>Device: </a:t>
+            </a:r>
+            <a:r>
+              <a:rPr lang="en-US" dirty="0"/>
+              <a:t>Deploying the lane keep assist software onto the actual ECU hardware it will run on.</a:t>
+            </a:r>
+            <a:endParaRPr lang="en-US" dirty="0">
+              <a:solidFill>
+                <a:schemeClr val="accent4">
+                  <a:lumMod val="50000"/>
+                </a:schemeClr>
+              </a:solidFill>
+            </a:endParaRPr>
+          </a:p>
+          <a:p>
+            <a:pPr lvl="1"/>
+            <a:r>
+              <a:rPr lang="en-US" dirty="0">
+                <a:solidFill>
+                  <a:schemeClr val="accent4">
+                    <a:lumMod val="50000"/>
+                  </a:schemeClr>
+                </a:solidFill>
+              </a:rPr>
+              <a:t>System: </a:t>
+            </a:r>
+            <a:r>
+              <a:rPr lang="en-US" dirty="0"/>
+              <a:t>Testing the fully integrated car system.</a:t>
+            </a:r>
+          </a:p>
+          <a:p>
+            <a:r>
+              <a:rPr lang="en-US" dirty="0">
+                <a:solidFill>
+                  <a:schemeClr val="accent1"/>
+                </a:solidFill>
+              </a:rPr>
+              <a:t>Test traceability</a:t>
+            </a:r>
+            <a:r>
+              <a:rPr lang="en-US" dirty="0"/>
+              <a:t>: If an issue is found in step 4, it needs to be reproducible and traceable through all test setups.</a:t>
+            </a:r>
+            <a:endParaRPr lang="en-US" dirty="0">
+              <a:solidFill>
+                <a:schemeClr val="accent4">
+                  <a:lumMod val="50000"/>
+                </a:schemeClr>
+              </a:solidFill>
+            </a:endParaRPr>
           </a:p>
         </p:txBody>
       </p:sp>
@@ -4704,7 +5101,7 @@
           <p:cNvPr id="3" name="Title 2">
             <a:extLst>
               <a:ext uri="{FF2B5EF4-FFF2-40B4-BE49-F238E27FC236}">
-                <a16:creationId xmlns:a16="http://schemas.microsoft.com/office/drawing/2014/main" id="{98B62852-86A9-86DC-CCBE-CF96926B3F20}"/>
+                <a16:creationId xmlns:a16="http://schemas.microsoft.com/office/drawing/2014/main" id="{D290AA82-B48B-3AE2-ED69-10889B30ED9E}"/>
               </a:ext>
             </a:extLst>
           </p:cNvPr>
@@ -4722,7 +5119,7 @@
           <a:p>
             <a:r>
               <a:rPr lang="en-US" dirty="0"/>
-              <a:t>Logging</a:t>
+              <a:t>Testing</a:t>
             </a:r>
           </a:p>
         </p:txBody>
@@ -4732,7 +5129,7 @@
           <p:cNvPr id="4" name="Slide Number Placeholder 3">
             <a:extLst>
               <a:ext uri="{FF2B5EF4-FFF2-40B4-BE49-F238E27FC236}">
-                <a16:creationId xmlns:a16="http://schemas.microsoft.com/office/drawing/2014/main" id="{0B3306FD-9C0A-07F8-EA6C-5A51671F5A8B}"/>
+                <a16:creationId xmlns:a16="http://schemas.microsoft.com/office/drawing/2014/main" id="{B9034F4C-2260-77B1-3DA7-9EFE19BF156B}"/>
               </a:ext>
             </a:extLst>
           </p:cNvPr>
@@ -4760,7 +5157,120 @@
     </p:spTree>
     <p:extLst>
       <p:ext uri="{BB962C8B-B14F-4D97-AF65-F5344CB8AC3E}">
-        <p14:creationId xmlns:p14="http://schemas.microsoft.com/office/powerpoint/2010/main" val="1541215525"/>
+        <p14:creationId xmlns:p14="http://schemas.microsoft.com/office/powerpoint/2010/main" val="1348650789"/>
+      </p:ext>
+    </p:extLst>
+  </p:cSld>
+  <p:clrMapOvr>
+    <a:masterClrMapping/>
+  </p:clrMapOvr>
+</p:sld>
+</file>
+
+<file path=ppt/slides/slide19.xml><?xml version="1.0" encoding="utf-8"?>
+<p:sld xmlns:a="http://schemas.openxmlformats.org/drawingml/2006/main" xmlns:r="http://schemas.openxmlformats.org/officeDocument/2006/relationships" xmlns:p="http://schemas.openxmlformats.org/presentationml/2006/main">
+  <p:cSld>
+    <p:spTree>
+      <p:nvGrpSpPr>
+        <p:cNvPr id="1" name=""/>
+        <p:cNvGrpSpPr/>
+        <p:nvPr/>
+      </p:nvGrpSpPr>
+      <p:grpSpPr>
+        <a:xfrm>
+          <a:off x="0" y="0"/>
+          <a:ext cx="0" cy="0"/>
+          <a:chOff x="0" y="0"/>
+          <a:chExt cx="0" cy="0"/>
+        </a:xfrm>
+      </p:grpSpPr>
+      <p:sp>
+        <p:nvSpPr>
+          <p:cNvPr id="2" name="Content Placeholder 1">
+            <a:extLst>
+              <a:ext uri="{FF2B5EF4-FFF2-40B4-BE49-F238E27FC236}">
+                <a16:creationId xmlns:a16="http://schemas.microsoft.com/office/drawing/2014/main" id="{12D54165-E559-8060-B894-097172383734}"/>
+              </a:ext>
+            </a:extLst>
+          </p:cNvPr>
+          <p:cNvSpPr>
+            <a:spLocks noGrp="1"/>
+          </p:cNvSpPr>
+          <p:nvPr>
+            <p:ph sz="half" idx="2"/>
+          </p:nvPr>
+        </p:nvSpPr>
+        <p:spPr/>
+        <p:txBody>
+          <a:bodyPr/>
+          <a:lstStyle/>
+          <a:p>
+            <a:endParaRPr lang="en-US" dirty="0"/>
+          </a:p>
+        </p:txBody>
+      </p:sp>
+      <p:sp>
+        <p:nvSpPr>
+          <p:cNvPr id="3" name="Title 2">
+            <a:extLst>
+              <a:ext uri="{FF2B5EF4-FFF2-40B4-BE49-F238E27FC236}">
+                <a16:creationId xmlns:a16="http://schemas.microsoft.com/office/drawing/2014/main" id="{6646740C-EACF-AF71-37AB-B4B32BF4E893}"/>
+              </a:ext>
+            </a:extLst>
+          </p:cNvPr>
+          <p:cNvSpPr>
+            <a:spLocks noGrp="1"/>
+          </p:cNvSpPr>
+          <p:nvPr>
+            <p:ph type="title"/>
+          </p:nvPr>
+        </p:nvSpPr>
+        <p:spPr/>
+        <p:txBody>
+          <a:bodyPr/>
+          <a:lstStyle/>
+          <a:p>
+            <a:r>
+              <a:rPr lang="en-US" dirty="0"/>
+              <a:t>Deploying Updates</a:t>
+            </a:r>
+          </a:p>
+        </p:txBody>
+      </p:sp>
+      <p:sp>
+        <p:nvSpPr>
+          <p:cNvPr id="4" name="Slide Number Placeholder 3">
+            <a:extLst>
+              <a:ext uri="{FF2B5EF4-FFF2-40B4-BE49-F238E27FC236}">
+                <a16:creationId xmlns:a16="http://schemas.microsoft.com/office/drawing/2014/main" id="{5AB65DAD-BBFE-5FF7-105F-7014FC846C43}"/>
+              </a:ext>
+            </a:extLst>
+          </p:cNvPr>
+          <p:cNvSpPr>
+            <a:spLocks noGrp="1"/>
+          </p:cNvSpPr>
+          <p:nvPr>
+            <p:ph type="sldNum" sz="quarter" idx="10"/>
+          </p:nvPr>
+        </p:nvSpPr>
+        <p:spPr/>
+        <p:txBody>
+          <a:bodyPr/>
+          <a:lstStyle/>
+          <a:p>
+            <a:fld id="{AE311D09-C3D9-45E8-99CE-78E12234EEAD}" type="slidenum">
+              <a:rPr lang="en-US" smtClean="0"/>
+              <a:pPr/>
+              <a:t>19</a:t>
+            </a:fld>
+            <a:endParaRPr lang="en-US" dirty="0"/>
+          </a:p>
+        </p:txBody>
+      </p:sp>
+    </p:spTree>
+    <p:extLst>
+      <p:ext uri="{BB962C8B-B14F-4D97-AF65-F5344CB8AC3E}">
+        <p14:creationId xmlns:p14="http://schemas.microsoft.com/office/powerpoint/2010/main" val="517065085"/>
       </p:ext>
     </p:extLst>
   </p:cSld>
@@ -4856,6 +5366,232 @@
 </p:sld>
 </file>
 
+<file path=ppt/slides/slide20.xml><?xml version="1.0" encoding="utf-8"?>
+<p:sld xmlns:a="http://schemas.openxmlformats.org/drawingml/2006/main" xmlns:r="http://schemas.openxmlformats.org/officeDocument/2006/relationships" xmlns:p="http://schemas.openxmlformats.org/presentationml/2006/main">
+  <p:cSld>
+    <p:spTree>
+      <p:nvGrpSpPr>
+        <p:cNvPr id="1" name=""/>
+        <p:cNvGrpSpPr/>
+        <p:nvPr/>
+      </p:nvGrpSpPr>
+      <p:grpSpPr>
+        <a:xfrm>
+          <a:off x="0" y="0"/>
+          <a:ext cx="0" cy="0"/>
+          <a:chOff x="0" y="0"/>
+          <a:chExt cx="0" cy="0"/>
+        </a:xfrm>
+      </p:grpSpPr>
+      <p:sp>
+        <p:nvSpPr>
+          <p:cNvPr id="2" name="Content Placeholder 1">
+            <a:extLst>
+              <a:ext uri="{FF2B5EF4-FFF2-40B4-BE49-F238E27FC236}">
+                <a16:creationId xmlns:a16="http://schemas.microsoft.com/office/drawing/2014/main" id="{B45E60EB-F59B-9689-3EDE-E38FA4346761}"/>
+              </a:ext>
+            </a:extLst>
+          </p:cNvPr>
+          <p:cNvSpPr>
+            <a:spLocks noGrp="1"/>
+          </p:cNvSpPr>
+          <p:nvPr>
+            <p:ph sz="half" idx="2"/>
+          </p:nvPr>
+        </p:nvSpPr>
+        <p:spPr/>
+        <p:txBody>
+          <a:bodyPr/>
+          <a:lstStyle/>
+          <a:p>
+            <a:endParaRPr lang="en-US"/>
+          </a:p>
+        </p:txBody>
+      </p:sp>
+      <p:sp>
+        <p:nvSpPr>
+          <p:cNvPr id="3" name="Title 2">
+            <a:extLst>
+              <a:ext uri="{FF2B5EF4-FFF2-40B4-BE49-F238E27FC236}">
+                <a16:creationId xmlns:a16="http://schemas.microsoft.com/office/drawing/2014/main" id="{98B62852-86A9-86DC-CCBE-CF96926B3F20}"/>
+              </a:ext>
+            </a:extLst>
+          </p:cNvPr>
+          <p:cNvSpPr>
+            <a:spLocks noGrp="1"/>
+          </p:cNvSpPr>
+          <p:nvPr>
+            <p:ph type="title"/>
+          </p:nvPr>
+        </p:nvSpPr>
+        <p:spPr/>
+        <p:txBody>
+          <a:bodyPr/>
+          <a:lstStyle/>
+          <a:p>
+            <a:r>
+              <a:rPr lang="en-US" dirty="0"/>
+              <a:t>Logging</a:t>
+            </a:r>
+          </a:p>
+        </p:txBody>
+      </p:sp>
+      <p:sp>
+        <p:nvSpPr>
+          <p:cNvPr id="4" name="Slide Number Placeholder 3">
+            <a:extLst>
+              <a:ext uri="{FF2B5EF4-FFF2-40B4-BE49-F238E27FC236}">
+                <a16:creationId xmlns:a16="http://schemas.microsoft.com/office/drawing/2014/main" id="{0B3306FD-9C0A-07F8-EA6C-5A51671F5A8B}"/>
+              </a:ext>
+            </a:extLst>
+          </p:cNvPr>
+          <p:cNvSpPr>
+            <a:spLocks noGrp="1"/>
+          </p:cNvSpPr>
+          <p:nvPr>
+            <p:ph type="sldNum" sz="quarter" idx="10"/>
+          </p:nvPr>
+        </p:nvSpPr>
+        <p:spPr/>
+        <p:txBody>
+          <a:bodyPr/>
+          <a:lstStyle/>
+          <a:p>
+            <a:fld id="{AE311D09-C3D9-45E8-99CE-78E12234EEAD}" type="slidenum">
+              <a:rPr lang="en-US" smtClean="0"/>
+              <a:pPr/>
+              <a:t>20</a:t>
+            </a:fld>
+            <a:endParaRPr lang="en-US" dirty="0"/>
+          </a:p>
+        </p:txBody>
+      </p:sp>
+    </p:spTree>
+    <p:extLst>
+      <p:ext uri="{BB962C8B-B14F-4D97-AF65-F5344CB8AC3E}">
+        <p14:creationId xmlns:p14="http://schemas.microsoft.com/office/powerpoint/2010/main" val="1541215525"/>
+      </p:ext>
+    </p:extLst>
+  </p:cSld>
+  <p:clrMapOvr>
+    <a:masterClrMapping/>
+  </p:clrMapOvr>
+</p:sld>
+</file>
+
+<file path=ppt/slides/slide21.xml><?xml version="1.0" encoding="utf-8"?>
+<p:sld xmlns:a="http://schemas.openxmlformats.org/drawingml/2006/main" xmlns:r="http://schemas.openxmlformats.org/officeDocument/2006/relationships" xmlns:p="http://schemas.openxmlformats.org/presentationml/2006/main">
+  <p:cSld>
+    <p:spTree>
+      <p:nvGrpSpPr>
+        <p:cNvPr id="1" name=""/>
+        <p:cNvGrpSpPr/>
+        <p:nvPr/>
+      </p:nvGrpSpPr>
+      <p:grpSpPr>
+        <a:xfrm>
+          <a:off x="0" y="0"/>
+          <a:ext cx="0" cy="0"/>
+          <a:chOff x="0" y="0"/>
+          <a:chExt cx="0" cy="0"/>
+        </a:xfrm>
+      </p:grpSpPr>
+      <p:sp>
+        <p:nvSpPr>
+          <p:cNvPr id="2" name="Content Placeholder 1">
+            <a:extLst>
+              <a:ext uri="{FF2B5EF4-FFF2-40B4-BE49-F238E27FC236}">
+                <a16:creationId xmlns:a16="http://schemas.microsoft.com/office/drawing/2014/main" id="{B5BDAD25-44F3-FE7A-A647-59F99A73B8E0}"/>
+              </a:ext>
+            </a:extLst>
+          </p:cNvPr>
+          <p:cNvSpPr>
+            <a:spLocks noGrp="1"/>
+          </p:cNvSpPr>
+          <p:nvPr>
+            <p:ph sz="half" idx="2"/>
+          </p:nvPr>
+        </p:nvSpPr>
+        <p:spPr/>
+        <p:txBody>
+          <a:bodyPr/>
+          <a:lstStyle/>
+          <a:p>
+            <a:endParaRPr lang="en-US"/>
+          </a:p>
+        </p:txBody>
+      </p:sp>
+      <p:sp>
+        <p:nvSpPr>
+          <p:cNvPr id="3" name="Title 2">
+            <a:extLst>
+              <a:ext uri="{FF2B5EF4-FFF2-40B4-BE49-F238E27FC236}">
+                <a16:creationId xmlns:a16="http://schemas.microsoft.com/office/drawing/2014/main" id="{4A816B58-4FA5-D47A-1235-58B18707F5C1}"/>
+              </a:ext>
+            </a:extLst>
+          </p:cNvPr>
+          <p:cNvSpPr>
+            <a:spLocks noGrp="1"/>
+          </p:cNvSpPr>
+          <p:nvPr>
+            <p:ph type="title"/>
+          </p:nvPr>
+        </p:nvSpPr>
+        <p:spPr/>
+        <p:txBody>
+          <a:bodyPr/>
+          <a:lstStyle/>
+          <a:p>
+            <a:r>
+              <a:rPr lang="en-US" dirty="0"/>
+              <a:t>Summary</a:t>
+            </a:r>
+          </a:p>
+        </p:txBody>
+      </p:sp>
+      <p:sp>
+        <p:nvSpPr>
+          <p:cNvPr id="4" name="Slide Number Placeholder 3">
+            <a:extLst>
+              <a:ext uri="{FF2B5EF4-FFF2-40B4-BE49-F238E27FC236}">
+                <a16:creationId xmlns:a16="http://schemas.microsoft.com/office/drawing/2014/main" id="{A7428F95-DBED-D507-CE51-B4EDA7505632}"/>
+              </a:ext>
+            </a:extLst>
+          </p:cNvPr>
+          <p:cNvSpPr>
+            <a:spLocks noGrp="1"/>
+          </p:cNvSpPr>
+          <p:nvPr>
+            <p:ph type="sldNum" sz="quarter" idx="10"/>
+          </p:nvPr>
+        </p:nvSpPr>
+        <p:spPr/>
+        <p:txBody>
+          <a:bodyPr/>
+          <a:lstStyle/>
+          <a:p>
+            <a:fld id="{AE311D09-C3D9-45E8-99CE-78E12234EEAD}" type="slidenum">
+              <a:rPr lang="en-US" smtClean="0"/>
+              <a:pPr/>
+              <a:t>21</a:t>
+            </a:fld>
+            <a:endParaRPr lang="en-US" dirty="0"/>
+          </a:p>
+        </p:txBody>
+      </p:sp>
+    </p:spTree>
+    <p:extLst>
+      <p:ext uri="{BB962C8B-B14F-4D97-AF65-F5344CB8AC3E}">
+        <p14:creationId xmlns:p14="http://schemas.microsoft.com/office/powerpoint/2010/main" val="1082238275"/>
+      </p:ext>
+    </p:extLst>
+  </p:cSld>
+  <p:clrMapOvr>
+    <a:masterClrMapping/>
+  </p:clrMapOvr>
+</p:sld>
+</file>
+
 <file path=ppt/slides/slide3.xml><?xml version="1.0" encoding="utf-8"?>
 <p:sld xmlns:a="http://schemas.openxmlformats.org/drawingml/2006/main" xmlns:r="http://schemas.openxmlformats.org/officeDocument/2006/relationships" xmlns:p="http://schemas.openxmlformats.org/presentationml/2006/main">
   <p:cSld>
@@ -4875,141 +5611,10 @@
       </p:grpSpPr>
       <p:sp>
         <p:nvSpPr>
-          <p:cNvPr id="2" name="Content Placeholder 1">
-            <a:extLst>
-              <a:ext uri="{FF2B5EF4-FFF2-40B4-BE49-F238E27FC236}">
-                <a16:creationId xmlns:a16="http://schemas.microsoft.com/office/drawing/2014/main" id="{08ACA5CC-49A7-CD72-0527-1904007C71B0}"/>
-              </a:ext>
-            </a:extLst>
-          </p:cNvPr>
-          <p:cNvSpPr>
-            <a:spLocks noGrp="1"/>
-          </p:cNvSpPr>
-          <p:nvPr>
-            <p:ph sz="half" idx="2"/>
-          </p:nvPr>
-        </p:nvSpPr>
-        <p:spPr/>
-        <p:txBody>
-          <a:bodyPr/>
-          <a:lstStyle/>
-          <a:p>
-            <a:r>
-              <a:rPr lang="en-US" dirty="0"/>
-              <a:t>A mobile system has the ability to be in movement. This makes dealing with some of its characteristics a different matter from dealing with fixed systems. In this chapter we focus on five of those characteristics:</a:t>
-            </a:r>
-          </a:p>
-          <a:p>
-            <a:pPr lvl="1"/>
-            <a:r>
-              <a:rPr lang="en-US" dirty="0">
-                <a:solidFill>
-                  <a:schemeClr val="accent1"/>
-                </a:solidFill>
-              </a:rPr>
-              <a:t>Energy:</a:t>
-            </a:r>
-            <a:r>
-              <a:rPr lang="en-US" dirty="0"/>
-              <a:t> Mobile systems must be concerned with using power efficiently.</a:t>
-            </a:r>
-          </a:p>
-          <a:p>
-            <a:pPr lvl="1"/>
-            <a:r>
-              <a:rPr lang="en-US" dirty="0">
-                <a:solidFill>
-                  <a:schemeClr val="accent1"/>
-                </a:solidFill>
-              </a:rPr>
-              <a:t>Network connectivity:</a:t>
-            </a:r>
-            <a:r>
-              <a:rPr lang="en-US" dirty="0"/>
-              <a:t> Mobile systems must connect to other devices. but their mobility makes these connections tricky.</a:t>
-            </a:r>
-          </a:p>
-          <a:p>
-            <a:pPr lvl="1"/>
-            <a:r>
-              <a:rPr lang="en-US" dirty="0">
-                <a:solidFill>
-                  <a:schemeClr val="accent1"/>
-                </a:solidFill>
-              </a:rPr>
-              <a:t>Sensors and actuators:</a:t>
-            </a:r>
-            <a:r>
-              <a:rPr lang="en-US" dirty="0"/>
-              <a:t> Mobile systems tend to gain more information from sensors than fixed systems do, and they often use actuators to interact with their environment.</a:t>
-            </a:r>
-          </a:p>
-          <a:p>
-            <a:pPr lvl="1"/>
-            <a:r>
-              <a:rPr lang="en-US" dirty="0">
-                <a:solidFill>
-                  <a:schemeClr val="accent1"/>
-                </a:solidFill>
-              </a:rPr>
-              <a:t>Resources:</a:t>
-            </a:r>
-            <a:r>
-              <a:rPr lang="en-US" dirty="0"/>
-              <a:t> Mobile systems tend to be more resource-constrained than fixed systems. Because they must be small and lightweight therefore limited on the resources they can provide.</a:t>
-            </a:r>
-          </a:p>
-          <a:p>
-            <a:pPr lvl="1"/>
-            <a:r>
-              <a:rPr lang="en-US" dirty="0">
-                <a:solidFill>
-                  <a:schemeClr val="accent1"/>
-                </a:solidFill>
-              </a:rPr>
-              <a:t>Life cycle:</a:t>
-            </a:r>
-            <a:r>
-              <a:rPr lang="en-US" dirty="0"/>
-              <a:t> Testing mobile systems differs from the testing of other systems. Deploying new versions also introduces some special issues.</a:t>
-            </a:r>
-          </a:p>
-        </p:txBody>
-      </p:sp>
-      <p:sp>
-        <p:nvSpPr>
-          <p:cNvPr id="3" name="Title 2">
-            <a:extLst>
-              <a:ext uri="{FF2B5EF4-FFF2-40B4-BE49-F238E27FC236}">
-                <a16:creationId xmlns:a16="http://schemas.microsoft.com/office/drawing/2014/main" id="{C78C32D4-64FC-5458-ADFE-2A37F923CEE5}"/>
-              </a:ext>
-            </a:extLst>
-          </p:cNvPr>
-          <p:cNvSpPr>
-            <a:spLocks noGrp="1"/>
-          </p:cNvSpPr>
-          <p:nvPr>
-            <p:ph type="title"/>
-          </p:nvPr>
-        </p:nvSpPr>
-        <p:spPr/>
-        <p:txBody>
-          <a:bodyPr/>
-          <a:lstStyle/>
-          <a:p>
-            <a:r>
-              <a:rPr lang="en-US" dirty="0"/>
-              <a:t>Introduction</a:t>
-            </a:r>
-          </a:p>
-        </p:txBody>
-      </p:sp>
-      <p:sp>
-        <p:nvSpPr>
-          <p:cNvPr id="4" name="Slide Number Placeholder 3">
-            <a:extLst>
-              <a:ext uri="{FF2B5EF4-FFF2-40B4-BE49-F238E27FC236}">
-                <a16:creationId xmlns:a16="http://schemas.microsoft.com/office/drawing/2014/main" id="{A722D081-7F0B-2568-EB83-688CB1ADF6B7}"/>
+          <p:cNvPr id="2" name="Slide Number Placeholder 1">
+            <a:extLst>
+              <a:ext uri="{FF2B5EF4-FFF2-40B4-BE49-F238E27FC236}">
+                <a16:creationId xmlns:a16="http://schemas.microsoft.com/office/drawing/2014/main" id="{2B7158C2-CA8F-14CF-F729-4A781D0E8FDE}"/>
               </a:ext>
             </a:extLst>
           </p:cNvPr>
@@ -5034,10 +5639,66 @@
           </a:p>
         </p:txBody>
       </p:sp>
+      <p:sp>
+        <p:nvSpPr>
+          <p:cNvPr id="3" name="Text Placeholder 2">
+            <a:extLst>
+              <a:ext uri="{FF2B5EF4-FFF2-40B4-BE49-F238E27FC236}">
+                <a16:creationId xmlns:a16="http://schemas.microsoft.com/office/drawing/2014/main" id="{EB349CD9-8BE3-430C-5FA1-9E499D5063D2}"/>
+              </a:ext>
+            </a:extLst>
+          </p:cNvPr>
+          <p:cNvSpPr>
+            <a:spLocks noGrp="1"/>
+          </p:cNvSpPr>
+          <p:nvPr>
+            <p:ph type="body" sz="quarter" idx="11"/>
+          </p:nvPr>
+        </p:nvSpPr>
+        <p:spPr/>
+        <p:txBody>
+          <a:bodyPr/>
+          <a:lstStyle/>
+          <a:p>
+            <a:r>
+              <a:rPr lang="en-US" dirty="0"/>
+              <a:t>The telephone will be used to inform people that a telegram has been sent.</a:t>
+            </a:r>
+          </a:p>
+        </p:txBody>
+      </p:sp>
+      <p:sp>
+        <p:nvSpPr>
+          <p:cNvPr id="4" name="Text Placeholder 3">
+            <a:extLst>
+              <a:ext uri="{FF2B5EF4-FFF2-40B4-BE49-F238E27FC236}">
+                <a16:creationId xmlns:a16="http://schemas.microsoft.com/office/drawing/2014/main" id="{0B924E7A-D6D9-EFC6-379A-A54B72157876}"/>
+              </a:ext>
+            </a:extLst>
+          </p:cNvPr>
+          <p:cNvSpPr>
+            <a:spLocks noGrp="1"/>
+          </p:cNvSpPr>
+          <p:nvPr>
+            <p:ph type="body" sz="quarter" idx="12"/>
+          </p:nvPr>
+        </p:nvSpPr>
+        <p:spPr/>
+        <p:txBody>
+          <a:bodyPr/>
+          <a:lstStyle/>
+          <a:p>
+            <a:r>
+              <a:rPr lang="en-US" dirty="0"/>
+              <a:t>—Alexander Graham Bell</a:t>
+            </a:r>
+          </a:p>
+        </p:txBody>
+      </p:sp>
     </p:spTree>
     <p:extLst>
       <p:ext uri="{BB962C8B-B14F-4D97-AF65-F5344CB8AC3E}">
-        <p14:creationId xmlns:p14="http://schemas.microsoft.com/office/powerpoint/2010/main" val="3403224332"/>
+        <p14:creationId xmlns:p14="http://schemas.microsoft.com/office/powerpoint/2010/main" val="3032188403"/>
       </p:ext>
     </p:extLst>
   </p:cSld>
@@ -5069,7 +5730,7 @@
           <p:cNvPr id="2" name="Content Placeholder 1">
             <a:extLst>
               <a:ext uri="{FF2B5EF4-FFF2-40B4-BE49-F238E27FC236}">
-                <a16:creationId xmlns:a16="http://schemas.microsoft.com/office/drawing/2014/main" id="{20C10618-A86C-A84B-62CF-7722CB3F8FAD}"/>
+                <a16:creationId xmlns:a16="http://schemas.microsoft.com/office/drawing/2014/main" id="{81EE3EFC-A5CC-32E8-6993-537E85A49E6C}"/>
               </a:ext>
             </a:extLst>
           </p:cNvPr>
@@ -5085,93 +5746,7 @@
           <a:bodyPr/>
           <a:lstStyle/>
           <a:p>
-            <a:r>
-              <a:rPr lang="en-US" dirty="0"/>
-              <a:t>In this section, we focus on the architectural concerns most relevant to managing the energy of mobile systems.</a:t>
-            </a:r>
-          </a:p>
-          <a:p>
-            <a:r>
-              <a:rPr lang="en-US" dirty="0">
-                <a:solidFill>
-                  <a:schemeClr val="accent4">
-                    <a:lumMod val="50000"/>
-                  </a:schemeClr>
-                </a:solidFill>
-              </a:rPr>
-              <a:t>Monitoring the Power Source</a:t>
-            </a:r>
-          </a:p>
-          <a:p>
-            <a:pPr lvl="1"/>
-            <a:r>
-              <a:rPr lang="en-US" dirty="0"/>
-              <a:t>We have introduced a category of tactics called </a:t>
-            </a:r>
-            <a:r>
-              <a:rPr lang="en-US" dirty="0">
-                <a:solidFill>
-                  <a:schemeClr val="accent1"/>
-                </a:solidFill>
-              </a:rPr>
-              <a:t>resource monitoring </a:t>
-            </a:r>
-            <a:r>
-              <a:rPr lang="en-US" dirty="0"/>
-              <a:t>for monitoring the usage of computational resources.</a:t>
-            </a:r>
-          </a:p>
-          <a:p>
-            <a:pPr lvl="1"/>
-            <a:r>
-              <a:rPr lang="en-US" dirty="0"/>
-              <a:t>In mobile systems, we need to monitor the energy source, so that we can initiate appropriate behavior when the energy available becomes low.</a:t>
-            </a:r>
-          </a:p>
-          <a:p>
-            <a:pPr lvl="1"/>
-            <a:r>
-              <a:rPr lang="en-US" dirty="0"/>
-              <a:t>A </a:t>
-            </a:r>
-            <a:r>
-              <a:rPr lang="en-US" dirty="0">
-                <a:solidFill>
-                  <a:schemeClr val="accent1"/>
-                </a:solidFill>
-              </a:rPr>
-              <a:t>smart battery </a:t>
-            </a:r>
-            <a:r>
-              <a:rPr lang="en-US" dirty="0"/>
-              <a:t>is a rechargeable battery pack with a built-in battery management system (</a:t>
-            </a:r>
-            <a:r>
-              <a:rPr lang="en-US" dirty="0">
-                <a:solidFill>
-                  <a:schemeClr val="accent1"/>
-                </a:solidFill>
-              </a:rPr>
-              <a:t>BMS</a:t>
-            </a:r>
-            <a:r>
-              <a:rPr lang="en-US" dirty="0"/>
-              <a:t>). The BMS can be queried to get the current state of the battery.</a:t>
-            </a:r>
-          </a:p>
-          <a:p>
-            <a:pPr lvl="1"/>
-            <a:r>
-              <a:rPr lang="en-US" dirty="0"/>
-              <a:t>Battery-powered mobile systems include a component, often in the kernel of the operating system, that knows how to interact with the BMS and can return the current battery capacity on request.</a:t>
-            </a:r>
-            <a:endParaRPr lang="en-US" dirty="0">
-              <a:solidFill>
-                <a:schemeClr val="accent4">
-                  <a:lumMod val="50000"/>
-                </a:schemeClr>
-              </a:solidFill>
-            </a:endParaRPr>
+            <a:endParaRPr lang="en-US" dirty="0"/>
           </a:p>
         </p:txBody>
       </p:sp>
@@ -5180,7 +5755,7 @@
           <p:cNvPr id="3" name="Title 2">
             <a:extLst>
               <a:ext uri="{FF2B5EF4-FFF2-40B4-BE49-F238E27FC236}">
-                <a16:creationId xmlns:a16="http://schemas.microsoft.com/office/drawing/2014/main" id="{E1FFE404-ED5E-D92E-4867-97758F5DA806}"/>
+                <a16:creationId xmlns:a16="http://schemas.microsoft.com/office/drawing/2014/main" id="{35896C3A-BA0F-762B-46B6-3E06256185B2}"/>
               </a:ext>
             </a:extLst>
           </p:cNvPr>
@@ -5198,7 +5773,7 @@
           <a:p>
             <a:r>
               <a:rPr lang="en-US" dirty="0"/>
-              <a:t>18.1 Energy</a:t>
+              <a:t>Chapter Outline </a:t>
             </a:r>
           </a:p>
         </p:txBody>
@@ -5208,7 +5783,7 @@
           <p:cNvPr id="4" name="Slide Number Placeholder 3">
             <a:extLst>
               <a:ext uri="{FF2B5EF4-FFF2-40B4-BE49-F238E27FC236}">
-                <a16:creationId xmlns:a16="http://schemas.microsoft.com/office/drawing/2014/main" id="{B986BA21-A1C4-E3E8-3C76-5F5567A86411}"/>
+                <a16:creationId xmlns:a16="http://schemas.microsoft.com/office/drawing/2014/main" id="{ECB47EFB-A6BB-D7A0-D70C-000DFAE4C2D7}"/>
               </a:ext>
             </a:extLst>
           </p:cNvPr>
@@ -5236,7 +5811,7 @@
     </p:spTree>
     <p:extLst>
       <p:ext uri="{BB962C8B-B14F-4D97-AF65-F5344CB8AC3E}">
-        <p14:creationId xmlns:p14="http://schemas.microsoft.com/office/powerpoint/2010/main" val="2229304247"/>
+        <p14:creationId xmlns:p14="http://schemas.microsoft.com/office/powerpoint/2010/main" val="3027980601"/>
       </p:ext>
     </p:extLst>
   </p:cSld>
@@ -5268,7 +5843,7 @@
           <p:cNvPr id="2" name="Content Placeholder 1">
             <a:extLst>
               <a:ext uri="{FF2B5EF4-FFF2-40B4-BE49-F238E27FC236}">
-                <a16:creationId xmlns:a16="http://schemas.microsoft.com/office/drawing/2014/main" id="{8E10A634-A829-E29A-F9E2-0BC838188149}"/>
+                <a16:creationId xmlns:a16="http://schemas.microsoft.com/office/drawing/2014/main" id="{08ACA5CC-49A7-CD72-0527-1904007C71B0}"/>
               </a:ext>
             </a:extLst>
           </p:cNvPr>
@@ -5285,89 +5860,83 @@
           <a:lstStyle/>
           <a:p>
             <a:r>
+              <a:rPr lang="en-US" dirty="0"/>
+              <a:t>A mobile system has the ability to be in movement. This makes dealing with some of its characteristics a different matter from dealing with fixed systems. In this chapter we focus on five of those characteristics:</a:t>
+            </a:r>
+          </a:p>
+          <a:p>
+            <a:pPr lvl="1"/>
+            <a:r>
               <a:rPr lang="en-US" dirty="0">
                 <a:solidFill>
-                  <a:schemeClr val="accent4">
-                    <a:lumMod val="50000"/>
-                  </a:schemeClr>
+                  <a:schemeClr val="accent1"/>
                 </a:solidFill>
               </a:rPr>
-              <a:t>Throttling Energy Usage</a:t>
+              <a:t>Energy:</a:t>
+            </a:r>
+            <a:r>
+              <a:rPr lang="en-US" dirty="0"/>
+              <a:t> Mobile systems must be concerned with using power efficiently.</a:t>
             </a:r>
           </a:p>
           <a:p>
             <a:pPr lvl="1"/>
             <a:r>
-              <a:rPr lang="en-US" dirty="0"/>
-              <a:t>Energy usage can be reduced by either terminating or degrading portions of the system that consume energy; this is the throttle usage tactic described in chapter 6.</a:t>
+              <a:rPr lang="en-US" dirty="0">
+                <a:solidFill>
+                  <a:schemeClr val="accent1"/>
+                </a:solidFill>
+              </a:rPr>
+              <a:t>Network connectivity:</a:t>
+            </a:r>
+            <a:r>
+              <a:rPr lang="en-US" dirty="0"/>
+              <a:t> Mobile systems must connect to other devices. but their mobility makes these connections tricky.</a:t>
             </a:r>
           </a:p>
           <a:p>
             <a:pPr lvl="1"/>
             <a:r>
-              <a:rPr lang="en-US" dirty="0"/>
-              <a:t>A common example is reducing the brightness or the refresh rate of the display on a smartphone.</a:t>
-            </a:r>
-          </a:p>
-          <a:p>
-            <a:r>
               <a:rPr lang="en-US" dirty="0">
                 <a:solidFill>
-                  <a:schemeClr val="accent4">
-                    <a:lumMod val="50000"/>
-                  </a:schemeClr>
+                  <a:schemeClr val="accent1"/>
                 </a:solidFill>
               </a:rPr>
-              <a:t>Tolerating a Loss of Power</a:t>
+              <a:t>Sensors and actuators:</a:t>
+            </a:r>
+            <a:r>
+              <a:rPr lang="en-US" dirty="0"/>
+              <a:t> Mobile systems tend to gain more information from sensors than fixed systems do, and they often use actuators to interact with their environment.</a:t>
             </a:r>
           </a:p>
           <a:p>
             <a:pPr lvl="1"/>
             <a:r>
-              <a:rPr lang="en-US" dirty="0"/>
-              <a:t>Mobile systems should gracefully tolerate power failures and restarts.</a:t>
-            </a:r>
-            <a:endParaRPr lang="en-US" dirty="0">
-              <a:solidFill>
-                <a:schemeClr val="accent4">
-                  <a:lumMod val="50000"/>
-                </a:schemeClr>
-              </a:solidFill>
-            </a:endParaRPr>
+              <a:rPr lang="en-US" dirty="0">
+                <a:solidFill>
+                  <a:schemeClr val="accent1"/>
+                </a:solidFill>
+              </a:rPr>
+              <a:t>Resources:</a:t>
+            </a:r>
+            <a:r>
+              <a:rPr lang="en-US" dirty="0"/>
+              <a:t> Mobile systems tend to be more resource-constrained than fixed systems. Because they must be small and lightweight therefore limited on the resources they can provide.</a:t>
+            </a:r>
           </a:p>
           <a:p>
             <a:pPr lvl="1"/>
             <a:r>
-              <a:rPr lang="en-US" dirty="0"/>
-              <a:t>Example requirements for these systems:</a:t>
-            </a:r>
-          </a:p>
-          <a:p>
-            <a:pPr lvl="2"/>
-            <a:r>
-              <a:rPr lang="en-US" dirty="0"/>
-              <a:t>The system’s computer does not suffer permanent damage if power is cut at any time.</a:t>
-            </a:r>
-          </a:p>
-          <a:p>
-            <a:pPr lvl="2"/>
-            <a:r>
-              <a:rPr lang="en-US" dirty="0"/>
-              <a:t>The system’s computer (re)starts the OS robustly whenever sufficient power is provided.</a:t>
-            </a:r>
-          </a:p>
-          <a:p>
-            <a:pPr lvl="2"/>
-            <a:r>
-              <a:rPr lang="en-US" dirty="0"/>
-              <a:t>The runtime environment can be killed at any moment without affecting the integrity of the binaries, configurations, and operational data in permanent storage.</a:t>
-            </a:r>
-          </a:p>
-          <a:p>
-            <a:pPr lvl="2"/>
-            <a:r>
-              <a:rPr lang="en-US" dirty="0"/>
-              <a:t>Applications need a strategy to deal with data that arrives while the application is inoperative.</a:t>
+              <a:rPr lang="en-US" dirty="0">
+                <a:solidFill>
+                  <a:schemeClr val="accent1"/>
+                </a:solidFill>
+              </a:rPr>
+              <a:t>Life cycle:</a:t>
+            </a:r>
+            <a:r>
+              <a:rPr lang="en-US" dirty="0"/>
+              <a:t> Testing mobile systems differs from the testing of other systems. Deploying new versions also introduces some special issues.</a:t>
             </a:r>
           </a:p>
         </p:txBody>
@@ -5377,7 +5946,7 @@
           <p:cNvPr id="3" name="Title 2">
             <a:extLst>
               <a:ext uri="{FF2B5EF4-FFF2-40B4-BE49-F238E27FC236}">
-                <a16:creationId xmlns:a16="http://schemas.microsoft.com/office/drawing/2014/main" id="{84040578-D203-08EC-D8D4-02F92FCA450C}"/>
+                <a16:creationId xmlns:a16="http://schemas.microsoft.com/office/drawing/2014/main" id="{C78C32D4-64FC-5458-ADFE-2A37F923CEE5}"/>
               </a:ext>
             </a:extLst>
           </p:cNvPr>
@@ -5395,7 +5964,7 @@
           <a:p>
             <a:r>
               <a:rPr lang="en-US" dirty="0"/>
-              <a:t>18.1 Energy</a:t>
+              <a:t>Introduction</a:t>
             </a:r>
           </a:p>
         </p:txBody>
@@ -5405,7 +5974,7 @@
           <p:cNvPr id="4" name="Slide Number Placeholder 3">
             <a:extLst>
               <a:ext uri="{FF2B5EF4-FFF2-40B4-BE49-F238E27FC236}">
-                <a16:creationId xmlns:a16="http://schemas.microsoft.com/office/drawing/2014/main" id="{2E79E887-B411-19B4-04D5-AC16A1D91505}"/>
+                <a16:creationId xmlns:a16="http://schemas.microsoft.com/office/drawing/2014/main" id="{A722D081-7F0B-2568-EB83-688CB1ADF6B7}"/>
               </a:ext>
             </a:extLst>
           </p:cNvPr>
@@ -5433,7 +6002,7 @@
     </p:spTree>
     <p:extLst>
       <p:ext uri="{BB962C8B-B14F-4D97-AF65-F5344CB8AC3E}">
-        <p14:creationId xmlns:p14="http://schemas.microsoft.com/office/powerpoint/2010/main" val="2887410783"/>
+        <p14:creationId xmlns:p14="http://schemas.microsoft.com/office/powerpoint/2010/main" val="3403224332"/>
       </p:ext>
     </p:extLst>
   </p:cSld>
@@ -5465,7 +6034,7 @@
           <p:cNvPr id="2" name="Content Placeholder 1">
             <a:extLst>
               <a:ext uri="{FF2B5EF4-FFF2-40B4-BE49-F238E27FC236}">
-                <a16:creationId xmlns:a16="http://schemas.microsoft.com/office/drawing/2014/main" id="{247B719D-34AF-259E-4B45-851CB29D25CA}"/>
+                <a16:creationId xmlns:a16="http://schemas.microsoft.com/office/drawing/2014/main" id="{20C10618-A86C-A84B-62CF-7722CB3F8FAD}"/>
               </a:ext>
             </a:extLst>
           </p:cNvPr>
@@ -5483,167 +6052,7 @@
           <a:p>
             <a:r>
               <a:rPr lang="en-US" dirty="0"/>
-              <a:t>Wireless networks are categorized based on the distance over which they operate.</a:t>
-            </a:r>
-          </a:p>
-          <a:p>
-            <a:pPr lvl="1"/>
-            <a:r>
-              <a:rPr lang="en-US" b="1" i="1" dirty="0">
-                <a:solidFill>
-                  <a:schemeClr val="tx1"/>
-                </a:solidFill>
-              </a:rPr>
-              <a:t>Within 4 centimeters</a:t>
-            </a:r>
-            <a:r>
-              <a:rPr lang="en-US" dirty="0"/>
-              <a:t>: </a:t>
-            </a:r>
-            <a:r>
-              <a:rPr lang="en-US" dirty="0">
-                <a:solidFill>
-                  <a:schemeClr val="accent1"/>
-                </a:solidFill>
-              </a:rPr>
-              <a:t>Near Field Communication </a:t>
-            </a:r>
-            <a:r>
-              <a:rPr lang="en-US" dirty="0"/>
-              <a:t>(</a:t>
-            </a:r>
-            <a:r>
-              <a:rPr lang="en-US" dirty="0">
-                <a:solidFill>
-                  <a:schemeClr val="accent1"/>
-                </a:solidFill>
-              </a:rPr>
-              <a:t>NFC</a:t>
-            </a:r>
-            <a:r>
-              <a:rPr lang="en-US" dirty="0"/>
-              <a:t>).</a:t>
-            </a:r>
-          </a:p>
-          <a:p>
-            <a:pPr lvl="1"/>
-            <a:r>
-              <a:rPr lang="en-US" b="1" i="1" dirty="0"/>
-              <a:t>Within 10 meters</a:t>
-            </a:r>
-            <a:r>
-              <a:rPr lang="en-US" i="1" dirty="0"/>
-              <a:t>:</a:t>
-            </a:r>
-            <a:r>
-              <a:rPr lang="en-US" dirty="0"/>
-              <a:t> The IEEE 802.15 family of standards covers this distance (Such as </a:t>
-            </a:r>
-            <a:r>
-              <a:rPr lang="en-US" dirty="0">
-                <a:solidFill>
-                  <a:schemeClr val="accent1"/>
-                </a:solidFill>
-              </a:rPr>
-              <a:t>Bluetooth</a:t>
-            </a:r>
-            <a:r>
-              <a:rPr lang="en-US" dirty="0">
-                <a:solidFill>
-                  <a:schemeClr val="tx1"/>
-                </a:solidFill>
-              </a:rPr>
-              <a:t>)</a:t>
-            </a:r>
-            <a:endParaRPr lang="en-US" dirty="0"/>
-          </a:p>
-          <a:p>
-            <a:pPr lvl="1"/>
-            <a:r>
-              <a:rPr lang="en-US" b="1" i="1" dirty="0"/>
-              <a:t>Within 100 meters</a:t>
-            </a:r>
-            <a:r>
-              <a:rPr lang="en-US" i="1" dirty="0"/>
-              <a:t>:</a:t>
-            </a:r>
-            <a:r>
-              <a:rPr lang="en-US" dirty="0"/>
-              <a:t> The IEEE 802.11 family of standards (</a:t>
-            </a:r>
-            <a:r>
-              <a:rPr lang="en-US" dirty="0">
-                <a:solidFill>
-                  <a:schemeClr val="accent1"/>
-                </a:solidFill>
-              </a:rPr>
-              <a:t>Wi-Fi</a:t>
-            </a:r>
-            <a:r>
-              <a:rPr lang="en-US" dirty="0"/>
-              <a:t>) is used within this distance.</a:t>
-            </a:r>
-          </a:p>
-          <a:p>
-            <a:pPr lvl="1"/>
-            <a:r>
-              <a:rPr lang="en-US" b="1" i="1" dirty="0"/>
-              <a:t>Within several kilometers</a:t>
-            </a:r>
-            <a:r>
-              <a:rPr lang="en-US" b="1" dirty="0"/>
-              <a:t>:</a:t>
-            </a:r>
-            <a:r>
-              <a:rPr lang="en-US" dirty="0"/>
-              <a:t> The IEEE 802.16 standards (</a:t>
-            </a:r>
-            <a:r>
-              <a:rPr lang="en-US" dirty="0">
-                <a:solidFill>
-                  <a:schemeClr val="accent1"/>
-                </a:solidFill>
-              </a:rPr>
-              <a:t>WiMAX</a:t>
-            </a:r>
-            <a:r>
-              <a:rPr lang="en-US" dirty="0"/>
-              <a:t>) cover this distance. </a:t>
-            </a:r>
-          </a:p>
-          <a:p>
-            <a:pPr lvl="1"/>
-            <a:r>
-              <a:rPr lang="en-US" b="1" i="1" dirty="0"/>
-              <a:t>More than several kilometers:</a:t>
-            </a:r>
-            <a:r>
-              <a:rPr lang="en-US" dirty="0"/>
-              <a:t> This is achieved by </a:t>
-            </a:r>
-            <a:r>
-              <a:rPr lang="en-US" dirty="0">
-                <a:solidFill>
-                  <a:schemeClr val="accent1"/>
-                </a:solidFill>
-              </a:rPr>
-              <a:t>cellular</a:t>
-            </a:r>
-            <a:r>
-              <a:rPr lang="en-US" dirty="0"/>
-              <a:t> or </a:t>
-            </a:r>
-            <a:r>
-              <a:rPr lang="en-US" dirty="0">
-                <a:solidFill>
-                  <a:schemeClr val="accent1"/>
-                </a:solidFill>
-              </a:rPr>
-              <a:t>satellite</a:t>
-            </a:r>
-            <a:r>
-              <a:rPr lang="en-US" dirty="0"/>
-              <a:t> communication.</a:t>
+              <a:t>In this section, we focus on the architectural concerns most relevant to managing the energy of mobile systems.</a:t>
             </a:r>
           </a:p>
           <a:p>
@@ -5655,26 +6064,79 @@
                   </a:schemeClr>
                 </a:solidFill>
               </a:rPr>
-              <a:t>Number of communication interfaces to support</a:t>
+              <a:t>Monitoring the Power Source</a:t>
             </a:r>
           </a:p>
           <a:p>
             <a:pPr lvl="1"/>
             <a:r>
               <a:rPr lang="en-US" dirty="0"/>
-              <a:t>There are many ways a device can connect to networks (Wi-Fi, Bluetooth, 5G, etc.).</a:t>
+              <a:t>We have introduced a category of tactics called </a:t>
+            </a:r>
+            <a:r>
+              <a:rPr lang="en-US" dirty="0">
+                <a:solidFill>
+                  <a:schemeClr val="accent1"/>
+                </a:solidFill>
+              </a:rPr>
+              <a:t>resource monitoring </a:t>
+            </a:r>
+            <a:r>
+              <a:rPr lang="en-US" dirty="0"/>
+              <a:t>for monitoring the usage of computational resources.</a:t>
             </a:r>
           </a:p>
           <a:p>
             <a:pPr lvl="1"/>
             <a:r>
-              <a:rPr lang="en-US" b="1" dirty="0"/>
-              <a:t>Architect’s job:</a:t>
-            </a:r>
-            <a:r>
-              <a:rPr lang="en-US" dirty="0"/>
-              <a:t> Be selective—only use what’s really needed. Too many interfaces increase power usage, heat, and take up space.</a:t>
-            </a:r>
+              <a:rPr lang="en-US" dirty="0"/>
+              <a:t>In mobile systems, we need to monitor the energy source, so that we can initiate appropriate behavior when the energy available becomes low.</a:t>
+            </a:r>
+          </a:p>
+          <a:p>
+            <a:pPr lvl="1"/>
+            <a:r>
+              <a:rPr lang="en-US" dirty="0"/>
+              <a:t>A </a:t>
+            </a:r>
+            <a:r>
+              <a:rPr lang="en-US" dirty="0">
+                <a:solidFill>
+                  <a:schemeClr val="accent1"/>
+                </a:solidFill>
+              </a:rPr>
+              <a:t>smart battery </a:t>
+            </a:r>
+            <a:r>
+              <a:rPr lang="en-US" dirty="0"/>
+              <a:t>is a rechargeable battery pack with a built-in battery management system (</a:t>
+            </a:r>
+            <a:r>
+              <a:rPr lang="en-US" dirty="0">
+                <a:solidFill>
+                  <a:schemeClr val="accent1"/>
+                </a:solidFill>
+              </a:rPr>
+              <a:t>BMS</a:t>
+            </a:r>
+            <a:r>
+              <a:rPr lang="en-US" dirty="0"/>
+              <a:t>). The BMS can be queried to get the current state of the battery.</a:t>
+            </a:r>
+          </a:p>
+          <a:p>
+            <a:pPr lvl="1"/>
+            <a:r>
+              <a:rPr lang="en-US" dirty="0"/>
+              <a:t>Battery-powered mobile systems include a component, often in the kernel of the operating system, that knows how to interact with the BMS and can return the current battery capacity on request.</a:t>
+            </a:r>
+            <a:endParaRPr lang="en-US" dirty="0">
+              <a:solidFill>
+                <a:schemeClr val="accent4">
+                  <a:lumMod val="50000"/>
+                </a:schemeClr>
+              </a:solidFill>
+            </a:endParaRPr>
           </a:p>
         </p:txBody>
       </p:sp>
@@ -5683,7 +6145,7 @@
           <p:cNvPr id="3" name="Title 2">
             <a:extLst>
               <a:ext uri="{FF2B5EF4-FFF2-40B4-BE49-F238E27FC236}">
-                <a16:creationId xmlns:a16="http://schemas.microsoft.com/office/drawing/2014/main" id="{8CA5F972-A66F-B928-F0EF-DB379107501A}"/>
+                <a16:creationId xmlns:a16="http://schemas.microsoft.com/office/drawing/2014/main" id="{E1FFE404-ED5E-D92E-4867-97758F5DA806}"/>
               </a:ext>
             </a:extLst>
           </p:cNvPr>
@@ -5696,14 +6158,12 @@
         </p:nvSpPr>
         <p:spPr/>
         <p:txBody>
-          <a:bodyPr>
-            <a:normAutofit/>
-          </a:bodyPr>
+          <a:bodyPr/>
           <a:lstStyle/>
           <a:p>
             <a:r>
               <a:rPr lang="en-US" dirty="0"/>
-              <a:t>18.2 Network Connectivity</a:t>
+              <a:t>18.1 Energy</a:t>
             </a:r>
           </a:p>
         </p:txBody>
@@ -5713,7 +6173,7 @@
           <p:cNvPr id="4" name="Slide Number Placeholder 3">
             <a:extLst>
               <a:ext uri="{FF2B5EF4-FFF2-40B4-BE49-F238E27FC236}">
-                <a16:creationId xmlns:a16="http://schemas.microsoft.com/office/drawing/2014/main" id="{9E39CBA9-E1E9-CA84-E428-3158D912894A}"/>
+                <a16:creationId xmlns:a16="http://schemas.microsoft.com/office/drawing/2014/main" id="{B986BA21-A1C4-E3E8-3C76-5F5567A86411}"/>
               </a:ext>
             </a:extLst>
           </p:cNvPr>
@@ -5741,7 +6201,7 @@
     </p:spTree>
     <p:extLst>
       <p:ext uri="{BB962C8B-B14F-4D97-AF65-F5344CB8AC3E}">
-        <p14:creationId xmlns:p14="http://schemas.microsoft.com/office/powerpoint/2010/main" val="2192523655"/>
+        <p14:creationId xmlns:p14="http://schemas.microsoft.com/office/powerpoint/2010/main" val="2229304247"/>
       </p:ext>
     </p:extLst>
   </p:cSld>
@@ -5773,7 +6233,7 @@
           <p:cNvPr id="2" name="Content Placeholder 1">
             <a:extLst>
               <a:ext uri="{FF2B5EF4-FFF2-40B4-BE49-F238E27FC236}">
-                <a16:creationId xmlns:a16="http://schemas.microsoft.com/office/drawing/2014/main" id="{80E2E43C-2F34-96BE-E55C-7DAD864FF4C9}"/>
+                <a16:creationId xmlns:a16="http://schemas.microsoft.com/office/drawing/2014/main" id="{8E10A634-A829-E29A-F9E2-0BC838188149}"/>
               </a:ext>
             </a:extLst>
           </p:cNvPr>
@@ -5797,26 +6257,21 @@
                   </a:schemeClr>
                 </a:solidFill>
               </a:rPr>
-              <a:t>Movement from One Protocol to Another</a:t>
+              <a:t>Throttling Energy Usage</a:t>
             </a:r>
           </a:p>
           <a:p>
             <a:pPr lvl="1"/>
             <a:r>
               <a:rPr lang="en-US" dirty="0"/>
-              <a:t>Sometimes, multiple network options are available at once.</a:t>
-            </a:r>
-            <a:endParaRPr lang="en-US" b="1" dirty="0"/>
+              <a:t>Energy usage can be reduced by either terminating or degrading portions of the system that consume energy; this is the throttle usage tactic described in chapter 6.</a:t>
+            </a:r>
           </a:p>
           <a:p>
             <a:pPr lvl="1"/>
             <a:r>
-              <a:rPr lang="en-US" b="1" dirty="0"/>
-              <a:t>Architect’s job:</a:t>
-            </a:r>
-            <a:r>
-              <a:rPr lang="en-US" dirty="0"/>
-              <a:t> The system should pick the best option automatically based on factors like speed, cost or battery life.</a:t>
+              <a:rPr lang="en-US" dirty="0"/>
+              <a:t>A common example is reducing the brightness or the refresh rate of the display on a smartphone.</a:t>
             </a:r>
           </a:p>
           <a:p>
@@ -5828,55 +6283,14 @@
                   </a:schemeClr>
                 </a:solidFill>
               </a:rPr>
-              <a:t>Modifiability</a:t>
+              <a:t>Tolerating a Loss of Power</a:t>
             </a:r>
           </a:p>
           <a:p>
             <a:pPr lvl="1"/>
             <a:r>
               <a:rPr lang="en-US" dirty="0"/>
-              <a:t>New communication technologies will emerge over time.</a:t>
-            </a:r>
-          </a:p>
-          <a:p>
-            <a:pPr lvl="1"/>
-            <a:r>
-              <a:rPr lang="en-US" b="1" dirty="0"/>
-              <a:t>Architect’s job:</a:t>
-            </a:r>
-            <a:r>
-              <a:rPr lang="en-US" dirty="0"/>
-              <a:t> Make it easy to add or replace parts of the system later so it can support new or updated network protocols.</a:t>
-            </a:r>
-          </a:p>
-          <a:p>
-            <a:r>
-              <a:rPr lang="en-US" dirty="0">
-                <a:solidFill>
-                  <a:schemeClr val="accent4">
-                    <a:lumMod val="50000"/>
-                  </a:schemeClr>
-                </a:solidFill>
-              </a:rPr>
-              <a:t>Bandwidth</a:t>
-            </a:r>
-          </a:p>
-          <a:p>
-            <a:pPr lvl="1"/>
-            <a:r>
-              <a:rPr lang="en-US" dirty="0"/>
-              <a:t>Different types of data (e.g., video vs. text) need different speeds, volumes, and delays.</a:t>
-            </a:r>
-          </a:p>
-          <a:p>
-            <a:pPr lvl="1"/>
-            <a:r>
-              <a:rPr lang="en-US" b="1" dirty="0"/>
-              <a:t>Architect’s job:</a:t>
-            </a:r>
-            <a:r>
-              <a:rPr lang="en-US" dirty="0"/>
-              <a:t> Understand what kind of data will be sent and choose protocols that match the performance needs (e.g., low latency for video calls).</a:t>
+              <a:t>Mobile systems should gracefully tolerate power failures and restarts.</a:t>
             </a:r>
             <a:endParaRPr lang="en-US" dirty="0">
               <a:solidFill>
@@ -5886,6 +6300,41 @@
               </a:solidFill>
             </a:endParaRPr>
           </a:p>
+          <a:p>
+            <a:pPr lvl="1"/>
+            <a:r>
+              <a:rPr lang="en-US" dirty="0"/>
+              <a:t>Example requirements for these systems:</a:t>
+            </a:r>
+          </a:p>
+          <a:p>
+            <a:pPr lvl="2"/>
+            <a:r>
+              <a:rPr lang="en-US" dirty="0"/>
+              <a:t>The system’s computer does not suffer permanent damage if power is cut at any time.</a:t>
+            </a:r>
+          </a:p>
+          <a:p>
+            <a:pPr lvl="2"/>
+            <a:r>
+              <a:rPr lang="en-US" dirty="0"/>
+              <a:t>The system’s computer (re)starts the OS robustly whenever sufficient power is provided.</a:t>
+            </a:r>
+          </a:p>
+          <a:p>
+            <a:pPr lvl="2"/>
+            <a:r>
+              <a:rPr lang="en-US" dirty="0"/>
+              <a:t>The runtime environment can be killed at any moment without affecting the integrity of the binaries, configurations, and operational data in permanent storage.</a:t>
+            </a:r>
+          </a:p>
+          <a:p>
+            <a:pPr lvl="2"/>
+            <a:r>
+              <a:rPr lang="en-US" dirty="0"/>
+              <a:t>Applications need a strategy to deal with data that arrives while the application is inoperative.</a:t>
+            </a:r>
+          </a:p>
         </p:txBody>
       </p:sp>
       <p:sp>
@@ -5893,7 +6342,7 @@
           <p:cNvPr id="3" name="Title 2">
             <a:extLst>
               <a:ext uri="{FF2B5EF4-FFF2-40B4-BE49-F238E27FC236}">
-                <a16:creationId xmlns:a16="http://schemas.microsoft.com/office/drawing/2014/main" id="{DD5B65FC-58AB-B33C-7B2A-48EF46580F25}"/>
+                <a16:creationId xmlns:a16="http://schemas.microsoft.com/office/drawing/2014/main" id="{84040578-D203-08EC-D8D4-02F92FCA450C}"/>
               </a:ext>
             </a:extLst>
           </p:cNvPr>
@@ -5911,7 +6360,7 @@
           <a:p>
             <a:r>
               <a:rPr lang="en-US" dirty="0"/>
-              <a:t>18.2 Network Connectivity</a:t>
+              <a:t>18.1 Energy</a:t>
             </a:r>
           </a:p>
         </p:txBody>
@@ -5921,7 +6370,7 @@
           <p:cNvPr id="4" name="Slide Number Placeholder 3">
             <a:extLst>
               <a:ext uri="{FF2B5EF4-FFF2-40B4-BE49-F238E27FC236}">
-                <a16:creationId xmlns:a16="http://schemas.microsoft.com/office/drawing/2014/main" id="{1D74389D-6173-4736-5157-9FF6F5281C60}"/>
+                <a16:creationId xmlns:a16="http://schemas.microsoft.com/office/drawing/2014/main" id="{2E79E887-B411-19B4-04D5-AC16A1D91505}"/>
               </a:ext>
             </a:extLst>
           </p:cNvPr>
@@ -5949,7 +6398,7 @@
     </p:spTree>
     <p:extLst>
       <p:ext uri="{BB962C8B-B14F-4D97-AF65-F5344CB8AC3E}">
-        <p14:creationId xmlns:p14="http://schemas.microsoft.com/office/powerpoint/2010/main" val="3464171373"/>
+        <p14:creationId xmlns:p14="http://schemas.microsoft.com/office/powerpoint/2010/main" val="2887410783"/>
       </p:ext>
     </p:extLst>
   </p:cSld>
@@ -5981,7 +6430,7 @@
           <p:cNvPr id="2" name="Content Placeholder 1">
             <a:extLst>
               <a:ext uri="{FF2B5EF4-FFF2-40B4-BE49-F238E27FC236}">
-                <a16:creationId xmlns:a16="http://schemas.microsoft.com/office/drawing/2014/main" id="{3FB29733-1634-E44B-B3F7-16B9E97981A9}"/>
+                <a16:creationId xmlns:a16="http://schemas.microsoft.com/office/drawing/2014/main" id="{247B719D-34AF-259E-4B45-851CB29D25CA}"/>
               </a:ext>
             </a:extLst>
           </p:cNvPr>
@@ -5996,6 +6445,172 @@
         <p:txBody>
           <a:bodyPr/>
           <a:lstStyle/>
+          <a:p>
+            <a:r>
+              <a:rPr lang="en-US" dirty="0"/>
+              <a:t>Wireless networks are categorized based on the distance over which they operate.</a:t>
+            </a:r>
+          </a:p>
+          <a:p>
+            <a:pPr lvl="1"/>
+            <a:r>
+              <a:rPr lang="en-US" b="1" i="1" dirty="0">
+                <a:solidFill>
+                  <a:schemeClr val="tx1"/>
+                </a:solidFill>
+              </a:rPr>
+              <a:t>Within 4 centimeters</a:t>
+            </a:r>
+            <a:r>
+              <a:rPr lang="en-US" dirty="0"/>
+              <a:t>: </a:t>
+            </a:r>
+            <a:r>
+              <a:rPr lang="en-US" dirty="0">
+                <a:solidFill>
+                  <a:schemeClr val="accent1"/>
+                </a:solidFill>
+              </a:rPr>
+              <a:t>Near Field Communication </a:t>
+            </a:r>
+            <a:r>
+              <a:rPr lang="en-US" dirty="0"/>
+              <a:t>(</a:t>
+            </a:r>
+            <a:r>
+              <a:rPr lang="en-US" dirty="0">
+                <a:solidFill>
+                  <a:schemeClr val="accent1"/>
+                </a:solidFill>
+              </a:rPr>
+              <a:t>NFC</a:t>
+            </a:r>
+            <a:r>
+              <a:rPr lang="en-US" dirty="0"/>
+              <a:t>).</a:t>
+            </a:r>
+          </a:p>
+          <a:p>
+            <a:pPr lvl="1"/>
+            <a:r>
+              <a:rPr lang="en-US" b="1" i="1" dirty="0"/>
+              <a:t>Within 10 meters</a:t>
+            </a:r>
+            <a:r>
+              <a:rPr lang="en-US" i="1" dirty="0"/>
+              <a:t>:</a:t>
+            </a:r>
+            <a:r>
+              <a:rPr lang="en-US" dirty="0"/>
+              <a:t> The IEEE 802.15 family of standards covers this distance (Such as </a:t>
+            </a:r>
+            <a:r>
+              <a:rPr lang="en-US" dirty="0">
+                <a:solidFill>
+                  <a:schemeClr val="accent1"/>
+                </a:solidFill>
+              </a:rPr>
+              <a:t>Bluetooth</a:t>
+            </a:r>
+            <a:r>
+              <a:rPr lang="en-US" dirty="0">
+                <a:solidFill>
+                  <a:schemeClr val="tx1"/>
+                </a:solidFill>
+              </a:rPr>
+              <a:t>)</a:t>
+            </a:r>
+            <a:endParaRPr lang="en-US" dirty="0"/>
+          </a:p>
+          <a:p>
+            <a:pPr lvl="1"/>
+            <a:r>
+              <a:rPr lang="en-US" b="1" i="1" dirty="0"/>
+              <a:t>Within 100 meters</a:t>
+            </a:r>
+            <a:r>
+              <a:rPr lang="en-US" i="1" dirty="0"/>
+              <a:t>:</a:t>
+            </a:r>
+            <a:r>
+              <a:rPr lang="en-US" dirty="0"/>
+              <a:t> The IEEE 802.11 family of standards (</a:t>
+            </a:r>
+            <a:r>
+              <a:rPr lang="en-US" dirty="0">
+                <a:solidFill>
+                  <a:schemeClr val="accent1"/>
+                </a:solidFill>
+              </a:rPr>
+              <a:t>Wi-Fi</a:t>
+            </a:r>
+            <a:r>
+              <a:rPr lang="en-US" dirty="0"/>
+              <a:t>) is used within this distance.</a:t>
+            </a:r>
+          </a:p>
+          <a:p>
+            <a:pPr lvl="1"/>
+            <a:r>
+              <a:rPr lang="en-US" b="1" i="1" dirty="0"/>
+              <a:t>Within several kilometers</a:t>
+            </a:r>
+            <a:r>
+              <a:rPr lang="en-US" b="1" dirty="0"/>
+              <a:t>:</a:t>
+            </a:r>
+            <a:r>
+              <a:rPr lang="en-US" dirty="0"/>
+              <a:t> The IEEE 802.16 standards (</a:t>
+            </a:r>
+            <a:r>
+              <a:rPr lang="en-US" dirty="0">
+                <a:solidFill>
+                  <a:schemeClr val="accent1"/>
+                </a:solidFill>
+              </a:rPr>
+              <a:t>WiMAX</a:t>
+            </a:r>
+            <a:r>
+              <a:rPr lang="en-US" dirty="0"/>
+              <a:t>) cover this distance. </a:t>
+            </a:r>
+          </a:p>
+          <a:p>
+            <a:pPr lvl="1"/>
+            <a:r>
+              <a:rPr lang="en-US" b="1" i="1" dirty="0"/>
+              <a:t>More than several kilometers:</a:t>
+            </a:r>
+            <a:r>
+              <a:rPr lang="en-US" dirty="0"/>
+              <a:t> This is achieved by </a:t>
+            </a:r>
+            <a:r>
+              <a:rPr lang="en-US" dirty="0">
+                <a:solidFill>
+                  <a:schemeClr val="accent1"/>
+                </a:solidFill>
+              </a:rPr>
+              <a:t>cellular</a:t>
+            </a:r>
+            <a:r>
+              <a:rPr lang="en-US" dirty="0"/>
+              <a:t> or </a:t>
+            </a:r>
+            <a:r>
+              <a:rPr lang="en-US" dirty="0">
+                <a:solidFill>
+                  <a:schemeClr val="accent1"/>
+                </a:solidFill>
+              </a:rPr>
+              <a:t>satellite</a:t>
+            </a:r>
+            <a:r>
+              <a:rPr lang="en-US" dirty="0"/>
+              <a:t> communication.</a:t>
+            </a:r>
+          </a:p>
           <a:p>
             <a:r>
               <a:rPr lang="en-US" dirty="0">
@@ -6005,14 +6620,14 @@
                   </a:schemeClr>
                 </a:solidFill>
               </a:rPr>
-              <a:t>Intermittent/Limited/No Connectivity</a:t>
+              <a:t>Number of communication interfaces to support</a:t>
             </a:r>
           </a:p>
           <a:p>
             <a:pPr lvl="1"/>
             <a:r>
               <a:rPr lang="en-US" dirty="0"/>
-              <a:t>Sometimes, a device will temporarily lose its network connection.</a:t>
+              <a:t>There are many ways a device can connect to networks (Wi-Fi, Bluetooth, 5G, etc.).</a:t>
             </a:r>
           </a:p>
           <a:p>
@@ -6023,45 +6638,8 @@
             </a:r>
             <a:r>
               <a:rPr lang="en-US" dirty="0"/>
-              <a:t> Design the system so it can handle network loss gracefully—save data, retry later, or switch to offline mode without breaking or losing work.</a:t>
-            </a:r>
-          </a:p>
-          <a:p>
-            <a:r>
-              <a:rPr lang="en-US" dirty="0">
-                <a:solidFill>
-                  <a:schemeClr val="accent4">
-                    <a:lumMod val="50000"/>
-                  </a:schemeClr>
-                </a:solidFill>
-              </a:rPr>
-              <a:t>Security</a:t>
-            </a:r>
-          </a:p>
-          <a:p>
-            <a:pPr lvl="1"/>
-            <a:r>
-              <a:rPr lang="en-US" dirty="0"/>
-              <a:t>Mobile communications are easy targets for attacks like data theft or fake networks.</a:t>
-            </a:r>
-          </a:p>
-          <a:p>
-            <a:pPr lvl="1"/>
-            <a:r>
-              <a:rPr lang="en-US" b="1" dirty="0"/>
-              <a:t>Architect’s job:</a:t>
-            </a:r>
-            <a:r>
-              <a:rPr lang="en-US" dirty="0"/>
-              <a:t> Protect communication with strong security measures (encryption, authentication, etc.) and be ready to respond to attacks.</a:t>
-            </a:r>
-            <a:endParaRPr lang="en-US" dirty="0">
-              <a:solidFill>
-                <a:schemeClr val="accent4">
-                  <a:lumMod val="50000"/>
-                </a:schemeClr>
-              </a:solidFill>
-            </a:endParaRPr>
+              <a:t> Be selective—only use what’s really needed. Too many interfaces increase power usage, heat, and take up space.</a:t>
+            </a:r>
           </a:p>
         </p:txBody>
       </p:sp>
@@ -6070,7 +6648,7 @@
           <p:cNvPr id="3" name="Title 2">
             <a:extLst>
               <a:ext uri="{FF2B5EF4-FFF2-40B4-BE49-F238E27FC236}">
-                <a16:creationId xmlns:a16="http://schemas.microsoft.com/office/drawing/2014/main" id="{76F0A9AB-AD14-E619-00B8-FAF6DB192508}"/>
+                <a16:creationId xmlns:a16="http://schemas.microsoft.com/office/drawing/2014/main" id="{8CA5F972-A66F-B928-F0EF-DB379107501A}"/>
               </a:ext>
             </a:extLst>
           </p:cNvPr>
@@ -6083,7 +6661,9 @@
         </p:nvSpPr>
         <p:spPr/>
         <p:txBody>
-          <a:bodyPr/>
+          <a:bodyPr>
+            <a:normAutofit/>
+          </a:bodyPr>
           <a:lstStyle/>
           <a:p>
             <a:r>
@@ -6098,7 +6678,7 @@
           <p:cNvPr id="4" name="Slide Number Placeholder 3">
             <a:extLst>
               <a:ext uri="{FF2B5EF4-FFF2-40B4-BE49-F238E27FC236}">
-                <a16:creationId xmlns:a16="http://schemas.microsoft.com/office/drawing/2014/main" id="{465EE25A-8C70-5FE8-6422-E5CCFAF52A18}"/>
+                <a16:creationId xmlns:a16="http://schemas.microsoft.com/office/drawing/2014/main" id="{9E39CBA9-E1E9-CA84-E428-3158D912894A}"/>
               </a:ext>
             </a:extLst>
           </p:cNvPr>
@@ -6126,7 +6706,7 @@
     </p:spTree>
     <p:extLst>
       <p:ext uri="{BB962C8B-B14F-4D97-AF65-F5344CB8AC3E}">
-        <p14:creationId xmlns:p14="http://schemas.microsoft.com/office/powerpoint/2010/main" val="222167287"/>
+        <p14:creationId xmlns:p14="http://schemas.microsoft.com/office/powerpoint/2010/main" val="2192523655"/>
       </p:ext>
     </p:extLst>
   </p:cSld>
@@ -6158,7 +6738,7 @@
           <p:cNvPr id="2" name="Content Placeholder 1">
             <a:extLst>
               <a:ext uri="{FF2B5EF4-FFF2-40B4-BE49-F238E27FC236}">
-                <a16:creationId xmlns:a16="http://schemas.microsoft.com/office/drawing/2014/main" id="{B98CE935-FB94-3FCE-FCA4-4760CC158A3B}"/>
+                <a16:creationId xmlns:a16="http://schemas.microsoft.com/office/drawing/2014/main" id="{80E2E43C-2F34-96BE-E55C-7DAD864FF4C9}"/>
               </a:ext>
             </a:extLst>
           </p:cNvPr>
@@ -6175,99 +6755,101 @@
           <a:lstStyle/>
           <a:p>
             <a:r>
-              <a:rPr lang="en-US" dirty="0"/>
-              <a:t>A </a:t>
-            </a:r>
-            <a:r>
               <a:rPr lang="en-US" dirty="0">
                 <a:solidFill>
-                  <a:schemeClr val="accent1"/>
+                  <a:schemeClr val="accent4">
+                    <a:lumMod val="50000"/>
+                  </a:schemeClr>
                 </a:solidFill>
               </a:rPr>
-              <a:t>sensor</a:t>
-            </a:r>
-            <a:r>
-              <a:rPr lang="en-US" dirty="0"/>
-              <a:t> is a device that detects the physical characteristics of its environment and translates those characteristics into an electronic </a:t>
-            </a:r>
+              <a:t>Movement from One Protocol to Another</a:t>
+            </a:r>
+          </a:p>
+          <a:p>
+            <a:pPr lvl="1"/>
+            <a:r>
+              <a:rPr lang="en-US" dirty="0"/>
+              <a:t>Sometimes, multiple network options are available at once.</a:t>
+            </a:r>
+            <a:endParaRPr lang="en-US" b="1" dirty="0"/>
+          </a:p>
+          <a:p>
+            <a:pPr lvl="1"/>
+            <a:r>
+              <a:rPr lang="en-US" b="1" dirty="0"/>
+              <a:t>Architect’s job:</a:t>
+            </a:r>
+            <a:r>
+              <a:rPr lang="en-US" dirty="0"/>
+              <a:t> The system should pick the best option automatically based on factors like speed, cost or battery life.</a:t>
+            </a:r>
+          </a:p>
+          <a:p>
             <a:r>
               <a:rPr lang="en-US" dirty="0">
                 <a:solidFill>
-                  <a:schemeClr val="accent1"/>
+                  <a:schemeClr val="accent4">
+                    <a:lumMod val="50000"/>
+                  </a:schemeClr>
                 </a:solidFill>
               </a:rPr>
-              <a:t>representation</a:t>
-            </a:r>
-            <a:r>
-              <a:rPr lang="en-US" dirty="0"/>
-              <a:t>.</a:t>
-            </a:r>
-          </a:p>
-          <a:p>
-            <a:r>
-              <a:rPr lang="en-US" dirty="0"/>
-              <a:t>An architect has several concerns with respect to sensors: </a:t>
+              <a:t>Modifiability</a:t>
             </a:r>
           </a:p>
           <a:p>
             <a:pPr lvl="1"/>
             <a:r>
               <a:rPr lang="en-US" dirty="0"/>
-              <a:t>How to create an accurate representation of the environment based on the sensor inputs.</a:t>
+              <a:t>New communication technologies will emerge over time.</a:t>
             </a:r>
           </a:p>
           <a:p>
             <a:pPr lvl="1"/>
             <a:r>
-              <a:rPr lang="en-US" dirty="0"/>
-              <a:t>How the system should respond to that representation of the environment.</a:t>
+              <a:rPr lang="en-US" b="1" dirty="0"/>
+              <a:t>Architect’s job:</a:t>
+            </a:r>
+            <a:r>
+              <a:rPr lang="en-US" dirty="0"/>
+              <a:t> Make it easy to add or replace parts of the system later so it can support new or updated network protocols.</a:t>
+            </a:r>
+          </a:p>
+          <a:p>
+            <a:r>
+              <a:rPr lang="en-US" dirty="0">
+                <a:solidFill>
+                  <a:schemeClr val="accent4">
+                    <a:lumMod val="50000"/>
+                  </a:schemeClr>
+                </a:solidFill>
+              </a:rPr>
+              <a:t>Bandwidth</a:t>
             </a:r>
           </a:p>
           <a:p>
             <a:pPr lvl="1"/>
             <a:r>
               <a:rPr lang="en-US" dirty="0"/>
-              <a:t>Security and privacy of the sensor data and actuator commands.</a:t>
+              <a:t>Different types of data (e.g., video vs. text) need different speeds, volumes, and delays.</a:t>
             </a:r>
           </a:p>
           <a:p>
             <a:pPr lvl="1"/>
             <a:r>
-              <a:rPr lang="en-US" dirty="0"/>
-              <a:t>Degraded operation. If sensors fail or become unreadable, the system should enter a degraded mode. </a:t>
-            </a:r>
-          </a:p>
-          <a:p>
-            <a:pPr lvl="2"/>
-            <a:r>
-              <a:rPr lang="en-US" dirty="0"/>
-              <a:t>For example, if GPS readings are not available in tunnels, the system can use dead reckoning techniques to estimate location.</a:t>
-            </a:r>
-          </a:p>
-          <a:p>
-            <a:r>
-              <a:rPr lang="en-US" dirty="0"/>
-              <a:t>Here we will focus on only the first concern.</a:t>
-            </a:r>
-          </a:p>
-          <a:p>
-            <a:pPr lvl="1"/>
-            <a:r>
-              <a:rPr lang="en-US" dirty="0"/>
-              <a:t>This is performed using the</a:t>
-            </a:r>
-            <a:r>
-              <a:rPr lang="en-US" dirty="0">
-                <a:solidFill>
-                  <a:schemeClr val="accent1"/>
-                </a:solidFill>
-              </a:rPr>
-              <a:t> sensor stack</a:t>
-            </a:r>
-            <a:r>
-              <a:rPr lang="en-US" dirty="0"/>
-              <a:t>—a confederation of devices and software drivers that help turn raw data into interpreted information about the environment.</a:t>
-            </a:r>
+              <a:rPr lang="en-US" b="1" dirty="0"/>
+              <a:t>Architect’s job:</a:t>
+            </a:r>
+            <a:r>
+              <a:rPr lang="en-US" dirty="0"/>
+              <a:t> Understand what kind of data will be sent and choose protocols that match the performance needs (e.g., low latency for video calls).</a:t>
+            </a:r>
+            <a:endParaRPr lang="en-US" dirty="0">
+              <a:solidFill>
+                <a:schemeClr val="accent4">
+                  <a:lumMod val="50000"/>
+                </a:schemeClr>
+              </a:solidFill>
+            </a:endParaRPr>
           </a:p>
         </p:txBody>
       </p:sp>
@@ -6276,7 +6858,7 @@
           <p:cNvPr id="3" name="Title 2">
             <a:extLst>
               <a:ext uri="{FF2B5EF4-FFF2-40B4-BE49-F238E27FC236}">
-                <a16:creationId xmlns:a16="http://schemas.microsoft.com/office/drawing/2014/main" id="{7614DD60-EC70-8BFA-7447-75E2F4A2D671}"/>
+                <a16:creationId xmlns:a16="http://schemas.microsoft.com/office/drawing/2014/main" id="{DD5B65FC-58AB-B33C-7B2A-48EF46580F25}"/>
               </a:ext>
             </a:extLst>
           </p:cNvPr>
@@ -6289,14 +6871,12 @@
         </p:nvSpPr>
         <p:spPr/>
         <p:txBody>
-          <a:bodyPr>
-            <a:normAutofit/>
-          </a:bodyPr>
+          <a:bodyPr/>
           <a:lstStyle/>
           <a:p>
             <a:r>
               <a:rPr lang="en-US" dirty="0"/>
-              <a:t>18.3 Sensors and Actuators</a:t>
+              <a:t>18.2 Network Connectivity</a:t>
             </a:r>
           </a:p>
         </p:txBody>
@@ -6306,7 +6886,7 @@
           <p:cNvPr id="4" name="Slide Number Placeholder 3">
             <a:extLst>
               <a:ext uri="{FF2B5EF4-FFF2-40B4-BE49-F238E27FC236}">
-                <a16:creationId xmlns:a16="http://schemas.microsoft.com/office/drawing/2014/main" id="{A6348AD6-C9CE-E594-20EC-002B5776D37A}"/>
+                <a16:creationId xmlns:a16="http://schemas.microsoft.com/office/drawing/2014/main" id="{1D74389D-6173-4736-5157-9FF6F5281C60}"/>
               </a:ext>
             </a:extLst>
           </p:cNvPr>
@@ -6334,7 +6914,7 @@
     </p:spTree>
     <p:extLst>
       <p:ext uri="{BB962C8B-B14F-4D97-AF65-F5344CB8AC3E}">
-        <p14:creationId xmlns:p14="http://schemas.microsoft.com/office/powerpoint/2010/main" val="3211065884"/>
+        <p14:creationId xmlns:p14="http://schemas.microsoft.com/office/powerpoint/2010/main" val="3464171373"/>
       </p:ext>
     </p:extLst>
   </p:cSld>

--- a/chapter 18.pptx
+++ b/chapter 18.pptx
@@ -246,7 +246,7 @@
           <a:p>
             <a:fld id="{13928E3B-7122-43E6-B3BB-09448C56C96C}" type="datetimeFigureOut">
               <a:rPr lang="en-US" smtClean="0"/>
-              <a:t>25/07/20</a:t>
+              <a:t>25/07/25</a:t>
             </a:fld>
             <a:endParaRPr lang="en-US" dirty="0"/>
           </a:p>
@@ -424,7 +424,7 @@
           <a:p>
             <a:fld id="{B98C9CAF-43DF-44BF-8016-DC193E4E594B}" type="datetimeFigureOut">
               <a:rPr lang="en-US" smtClean="0"/>
-              <a:t>25/07/20</a:t>
+              <a:t>25/07/25</a:t>
             </a:fld>
             <a:endParaRPr lang="en-US" dirty="0"/>
           </a:p>
@@ -3438,7 +3438,7 @@
           <a:p>
             <a:r>
               <a:rPr lang="en-US" dirty="0"/>
-              <a:t>18.2 Network Connectivity</a:t>
+              <a:t>Network Connectivity</a:t>
             </a:r>
           </a:p>
         </p:txBody>
@@ -3646,7 +3646,7 @@
           <a:p>
             <a:r>
               <a:rPr lang="en-US" dirty="0"/>
-              <a:t>18.3 Sensors and Actuators</a:t>
+              <a:t>Sensors and Actuators</a:t>
             </a:r>
           </a:p>
         </p:txBody>
@@ -3892,7 +3892,7 @@
           <a:p>
             <a:r>
               <a:rPr lang="en-US" dirty="0"/>
-              <a:t>18.3 Sensors and Actuators</a:t>
+              <a:t>Sensors and Actuators</a:t>
             </a:r>
           </a:p>
         </p:txBody>
@@ -4111,7 +4111,7 @@
           <a:p>
             <a:r>
               <a:rPr lang="en-US" dirty="0"/>
-              <a:t>18.4 Resources</a:t>
+              <a:t>Resources</a:t>
             </a:r>
           </a:p>
         </p:txBody>
@@ -4328,7 +4328,7 @@
           <a:p>
             <a:r>
               <a:rPr lang="en-US" dirty="0"/>
-              <a:t>18.4 Resources</a:t>
+              <a:t>Resources</a:t>
             </a:r>
           </a:p>
         </p:txBody>
@@ -4505,7 +4505,7 @@
           <a:p>
             <a:r>
               <a:rPr lang="en-US" dirty="0"/>
-              <a:t>18.5 Life Cycle</a:t>
+              <a:t>Life Cycle</a:t>
             </a:r>
           </a:p>
         </p:txBody>
@@ -5512,12 +5512,55 @@
             <p:ph sz="half" idx="2"/>
           </p:nvPr>
         </p:nvSpPr>
-        <p:spPr/>
+        <p:spPr>
+          <a:xfrm>
+            <a:off x="588977" y="1015164"/>
+            <a:ext cx="11058526" cy="5676247"/>
+          </a:xfrm>
+        </p:spPr>
         <p:txBody>
           <a:bodyPr/>
           <a:lstStyle/>
           <a:p>
-            <a:endParaRPr lang="en-US"/>
+            <a:r>
+              <a:rPr lang="en-US" dirty="0"/>
+              <a:t>The differences between mobile systems and fixed systems is based on five characteristics: energy, connectivity, sensors, resources, and life cycle.</a:t>
+            </a:r>
+          </a:p>
+          <a:p>
+            <a:pPr lvl="1"/>
+            <a:r>
+              <a:rPr lang="en-US" dirty="0"/>
+              <a:t>Energy usage in mobile systems can be controlled by throttling individual applications. Applications should be constructed to survive power failures and restart seamlessly when power is restored.</a:t>
+            </a:r>
+          </a:p>
+          <a:p>
+            <a:pPr lvl="1"/>
+            <a:r>
+              <a:rPr lang="en-US" dirty="0"/>
+              <a:t>Connectivity means connecting to other systems and the Internet through wireless means. </a:t>
+            </a:r>
+          </a:p>
+          <a:p>
+            <a:pPr lvl="1"/>
+            <a:r>
+              <a:rPr lang="en-US" dirty="0"/>
+              <a:t>Mobile systems utilize a variety of sensors. It may take multiple sensors to develop a meaningful representation.</a:t>
+            </a:r>
+          </a:p>
+          <a:p>
+            <a:pPr lvl="1"/>
+            <a:r>
+              <a:rPr lang="en-US" dirty="0"/>
+              <a:t>Resources have physical characteristics such as size and weight, have processing capabilities, and carry a cost. The design choices involve tradeoffs among these factors.</a:t>
+            </a:r>
+          </a:p>
+          <a:p>
+            <a:pPr lvl="1"/>
+            <a:r>
+              <a:rPr lang="en-US" dirty="0"/>
+              <a:t>Life-cycle issues include choice of hardware, testing, deploying updates, and logging. Testing and deployment of the user interface may be more complicated with mobile systems.</a:t>
+            </a:r>
           </a:p>
         </p:txBody>
       </p:sp>
@@ -5537,7 +5580,12 @@
             <p:ph type="title"/>
           </p:nvPr>
         </p:nvSpPr>
-        <p:spPr/>
+        <p:spPr>
+          <a:xfrm>
+            <a:off x="878889" y="153671"/>
+            <a:ext cx="10436810" cy="641281"/>
+          </a:xfrm>
+        </p:spPr>
         <p:txBody>
           <a:bodyPr/>
           <a:lstStyle/>
@@ -5565,7 +5613,12 @@
             <p:ph type="sldNum" sz="quarter" idx="10"/>
           </p:nvPr>
         </p:nvSpPr>
-        <p:spPr/>
+        <p:spPr>
+          <a:xfrm>
+            <a:off x="556149" y="153671"/>
+            <a:ext cx="670079" cy="641281"/>
+          </a:xfrm>
+        </p:spPr>
         <p:txBody>
           <a:bodyPr/>
           <a:lstStyle/>
@@ -5746,6 +5799,112 @@
           <a:bodyPr/>
           <a:lstStyle/>
           <a:p>
+            <a:pPr>
+              <a:spcBef>
+                <a:spcPts val="1200"/>
+              </a:spcBef>
+            </a:pPr>
+            <a:r>
+              <a:rPr lang="en-US" dirty="0"/>
+              <a:t>Introduction</a:t>
+            </a:r>
+          </a:p>
+          <a:p>
+            <a:pPr>
+              <a:spcBef>
+                <a:spcPts val="1200"/>
+              </a:spcBef>
+            </a:pPr>
+            <a:r>
+              <a:rPr lang="en-US" dirty="0"/>
+              <a:t>Energy</a:t>
+            </a:r>
+          </a:p>
+          <a:p>
+            <a:pPr>
+              <a:spcBef>
+                <a:spcPts val="1200"/>
+              </a:spcBef>
+            </a:pPr>
+            <a:r>
+              <a:rPr lang="en-US" dirty="0"/>
+              <a:t>Network Connectivity</a:t>
+            </a:r>
+          </a:p>
+          <a:p>
+            <a:pPr>
+              <a:spcBef>
+                <a:spcPts val="1200"/>
+              </a:spcBef>
+            </a:pPr>
+            <a:r>
+              <a:rPr lang="en-US" dirty="0"/>
+              <a:t>Sensors and Actuators</a:t>
+            </a:r>
+          </a:p>
+          <a:p>
+            <a:pPr>
+              <a:spcBef>
+                <a:spcPts val="1200"/>
+              </a:spcBef>
+            </a:pPr>
+            <a:r>
+              <a:rPr lang="en-US" dirty="0"/>
+              <a:t>Resources</a:t>
+            </a:r>
+          </a:p>
+          <a:p>
+            <a:pPr>
+              <a:spcBef>
+                <a:spcPts val="1200"/>
+              </a:spcBef>
+            </a:pPr>
+            <a:r>
+              <a:rPr lang="en-US" dirty="0"/>
+              <a:t>Life Cycle</a:t>
+            </a:r>
+          </a:p>
+          <a:p>
+            <a:pPr lvl="1"/>
+            <a:r>
+              <a:rPr lang="en-US" dirty="0"/>
+              <a:t>Hardware First</a:t>
+            </a:r>
+          </a:p>
+          <a:p>
+            <a:pPr lvl="1"/>
+            <a:r>
+              <a:rPr lang="en-US" dirty="0"/>
+              <a:t>Testing</a:t>
+            </a:r>
+          </a:p>
+          <a:p>
+            <a:pPr lvl="1"/>
+            <a:r>
+              <a:rPr lang="en-US" dirty="0"/>
+              <a:t>Deploying Updates</a:t>
+            </a:r>
+          </a:p>
+          <a:p>
+            <a:pPr lvl="1"/>
+            <a:r>
+              <a:rPr lang="en-US" dirty="0"/>
+              <a:t>Logging</a:t>
+            </a:r>
+          </a:p>
+          <a:p>
+            <a:pPr>
+              <a:spcBef>
+                <a:spcPts val="1200"/>
+              </a:spcBef>
+            </a:pPr>
+            <a:r>
+              <a:rPr lang="en-US" dirty="0"/>
+              <a:t>Summary</a:t>
+            </a:r>
+          </a:p>
+          <a:p>
+            <a:pPr lvl="1"/>
             <a:endParaRPr lang="en-US" dirty="0"/>
           </a:p>
         </p:txBody>
@@ -6163,7 +6322,7 @@
           <a:p>
             <a:r>
               <a:rPr lang="en-US" dirty="0"/>
-              <a:t>18.1 Energy</a:t>
+              <a:t>Energy</a:t>
             </a:r>
           </a:p>
         </p:txBody>
@@ -6360,7 +6519,7 @@
           <a:p>
             <a:r>
               <a:rPr lang="en-US" dirty="0"/>
-              <a:t>18.1 Energy</a:t>
+              <a:t>Energy</a:t>
             </a:r>
           </a:p>
         </p:txBody>
@@ -6668,7 +6827,7 @@
           <a:p>
             <a:r>
               <a:rPr lang="en-US" dirty="0"/>
-              <a:t>18.2 Network Connectivity</a:t>
+              <a:t>Network Connectivity</a:t>
             </a:r>
           </a:p>
         </p:txBody>
@@ -6876,7 +7035,7 @@
           <a:p>
             <a:r>
               <a:rPr lang="en-US" dirty="0"/>
-              <a:t>18.2 Network Connectivity</a:t>
+              <a:t>Network Connectivity</a:t>
             </a:r>
           </a:p>
         </p:txBody>

--- a/chapter 18.pptx
+++ b/chapter 18.pptx
@@ -5,10 +5,10 @@
     <p:sldMasterId id="2147483648" r:id="rId1"/>
   </p:sldMasterIdLst>
   <p:notesMasterIdLst>
-    <p:notesMasterId r:id="rId23"/>
+    <p:notesMasterId r:id="rId24"/>
   </p:notesMasterIdLst>
   <p:handoutMasterIdLst>
-    <p:handoutMasterId r:id="rId24"/>
+    <p:handoutMasterId r:id="rId25"/>
   </p:handoutMasterIdLst>
   <p:sldIdLst>
     <p:sldId id="259" r:id="rId2"/>
@@ -20,7 +20,7 @@
     <p:sldId id="284" r:id="rId8"/>
     <p:sldId id="285" r:id="rId9"/>
     <p:sldId id="286" r:id="rId10"/>
-    <p:sldId id="287" r:id="rId11"/>
+    <p:sldId id="302" r:id="rId11"/>
     <p:sldId id="288" r:id="rId12"/>
     <p:sldId id="289" r:id="rId13"/>
     <p:sldId id="290" r:id="rId14"/>
@@ -30,8 +30,9 @@
     <p:sldId id="294" r:id="rId18"/>
     <p:sldId id="295" r:id="rId19"/>
     <p:sldId id="296" r:id="rId20"/>
-    <p:sldId id="297" r:id="rId21"/>
-    <p:sldId id="300" r:id="rId22"/>
+    <p:sldId id="303" r:id="rId21"/>
+    <p:sldId id="297" r:id="rId22"/>
+    <p:sldId id="300" r:id="rId23"/>
   </p:sldIdLst>
   <p:sldSz cx="12192000" cy="6858000"/>
   <p:notesSz cx="6858000" cy="9144000"/>
@@ -3326,12 +3327,48 @@
           <a:chExt cx="0" cy="0"/>
         </a:xfrm>
       </p:grpSpPr>
-      <p:sp>
-        <p:nvSpPr>
-          <p:cNvPr id="2" name="Content Placeholder 1">
-            <a:extLst>
-              <a:ext uri="{FF2B5EF4-FFF2-40B4-BE49-F238E27FC236}">
-                <a16:creationId xmlns:a16="http://schemas.microsoft.com/office/drawing/2014/main" id="{3FB29733-1634-E44B-B3F7-16B9E97981A9}"/>
+      <p:pic>
+        <p:nvPicPr>
+          <p:cNvPr id="8" name="Picture Placeholder 7">
+            <a:extLst>
+              <a:ext uri="{FF2B5EF4-FFF2-40B4-BE49-F238E27FC236}">
+                <a16:creationId xmlns:a16="http://schemas.microsoft.com/office/drawing/2014/main" id="{7CEEE00F-FEA4-0B4F-7E6E-A49686FB7628}"/>
+              </a:ext>
+            </a:extLst>
+          </p:cNvPr>
+          <p:cNvPicPr>
+            <a:picLocks noGrp="1" noChangeAspect="1"/>
+          </p:cNvPicPr>
+          <p:nvPr>
+            <p:ph type="pic" sz="quarter" idx="11"/>
+          </p:nvPr>
+        </p:nvPicPr>
+        <p:blipFill rotWithShape="1">
+          <a:blip r:embed="rId2">
+            <a:extLst>
+              <a:ext uri="{28A0092B-C50C-407E-A947-70E740481C1C}">
+                <a14:useLocalDpi xmlns:a14="http://schemas.microsoft.com/office/drawing/2010/main" val="0"/>
+              </a:ext>
+            </a:extLst>
+          </a:blip>
+          <a:srcRect l="-27746" t="1899" r="-23623" b="22260"/>
+          <a:stretch>
+            <a:fillRect/>
+          </a:stretch>
+        </p:blipFill>
+        <p:spPr>
+          <a:xfrm>
+            <a:off x="5809426" y="1031785"/>
+            <a:ext cx="5826425" cy="3152748"/>
+          </a:xfrm>
+        </p:spPr>
+      </p:pic>
+      <p:sp>
+        <p:nvSpPr>
+          <p:cNvPr id="3" name="Content Placeholder 2">
+            <a:extLst>
+              <a:ext uri="{FF2B5EF4-FFF2-40B4-BE49-F238E27FC236}">
+                <a16:creationId xmlns:a16="http://schemas.microsoft.com/office/drawing/2014/main" id="{229AAE19-153E-D393-DC59-9C3A51D9A6D1}"/>
               </a:ext>
             </a:extLst>
           </p:cNvPr>
@@ -3376,6 +3413,31 @@
               <a:t> Design the system so it can handle network loss gracefully—save data, retry later, or switch to offline mode without breaking or losing work.</a:t>
             </a:r>
           </a:p>
+          <a:p>
+            <a:endParaRPr lang="en-US" dirty="0"/>
+          </a:p>
+        </p:txBody>
+      </p:sp>
+      <p:sp>
+        <p:nvSpPr>
+          <p:cNvPr id="4" name="Content Placeholder 3">
+            <a:extLst>
+              <a:ext uri="{FF2B5EF4-FFF2-40B4-BE49-F238E27FC236}">
+                <a16:creationId xmlns:a16="http://schemas.microsoft.com/office/drawing/2014/main" id="{A9490475-1D12-63B3-0AA2-587606CB09A0}"/>
+              </a:ext>
+            </a:extLst>
+          </p:cNvPr>
+          <p:cNvSpPr>
+            <a:spLocks noGrp="1"/>
+          </p:cNvSpPr>
+          <p:nvPr>
+            <p:ph sz="half" idx="12"/>
+          </p:nvPr>
+        </p:nvSpPr>
+        <p:spPr/>
+        <p:txBody>
+          <a:bodyPr/>
+          <a:lstStyle/>
           <a:p>
             <a:r>
               <a:rPr lang="en-US" dirty="0">
@@ -3413,14 +3475,17 @@
               </a:solidFill>
             </a:endParaRPr>
           </a:p>
-        </p:txBody>
-      </p:sp>
-      <p:sp>
-        <p:nvSpPr>
-          <p:cNvPr id="3" name="Title 2">
-            <a:extLst>
-              <a:ext uri="{FF2B5EF4-FFF2-40B4-BE49-F238E27FC236}">
-                <a16:creationId xmlns:a16="http://schemas.microsoft.com/office/drawing/2014/main" id="{76F0A9AB-AD14-E619-00B8-FAF6DB192508}"/>
+          <a:p>
+            <a:endParaRPr lang="en-US" dirty="0"/>
+          </a:p>
+        </p:txBody>
+      </p:sp>
+      <p:sp>
+        <p:nvSpPr>
+          <p:cNvPr id="5" name="Title 4">
+            <a:extLst>
+              <a:ext uri="{FF2B5EF4-FFF2-40B4-BE49-F238E27FC236}">
+                <a16:creationId xmlns:a16="http://schemas.microsoft.com/office/drawing/2014/main" id="{E6A30D57-55F7-86C9-435B-0428E1950F37}"/>
               </a:ext>
             </a:extLst>
           </p:cNvPr>
@@ -3445,18 +3510,18 @@
       </p:sp>
       <p:sp>
         <p:nvSpPr>
-          <p:cNvPr id="4" name="Slide Number Placeholder 3">
-            <a:extLst>
-              <a:ext uri="{FF2B5EF4-FFF2-40B4-BE49-F238E27FC236}">
-                <a16:creationId xmlns:a16="http://schemas.microsoft.com/office/drawing/2014/main" id="{465EE25A-8C70-5FE8-6422-E5CCFAF52A18}"/>
-              </a:ext>
-            </a:extLst>
-          </p:cNvPr>
-          <p:cNvSpPr>
-            <a:spLocks noGrp="1"/>
-          </p:cNvSpPr>
-          <p:nvPr>
-            <p:ph type="sldNum" sz="quarter" idx="10"/>
+          <p:cNvPr id="6" name="Slide Number Placeholder 5">
+            <a:extLst>
+              <a:ext uri="{FF2B5EF4-FFF2-40B4-BE49-F238E27FC236}">
+                <a16:creationId xmlns:a16="http://schemas.microsoft.com/office/drawing/2014/main" id="{BA1B7444-CA9B-7F26-F581-12C5458E346C}"/>
+              </a:ext>
+            </a:extLst>
+          </p:cNvPr>
+          <p:cNvSpPr>
+            <a:spLocks noGrp="1"/>
+          </p:cNvSpPr>
+          <p:nvPr>
+            <p:ph type="sldNum" sz="quarter" idx="13"/>
           </p:nvPr>
         </p:nvSpPr>
         <p:spPr/>
@@ -3476,7 +3541,7 @@
     </p:spTree>
     <p:extLst>
       <p:ext uri="{BB962C8B-B14F-4D97-AF65-F5344CB8AC3E}">
-        <p14:creationId xmlns:p14="http://schemas.microsoft.com/office/powerpoint/2010/main" val="222167287"/>
+        <p14:creationId xmlns:p14="http://schemas.microsoft.com/office/powerpoint/2010/main" val="3674603749"/>
       </p:ext>
     </p:extLst>
   </p:cSld>
@@ -5205,7 +5270,54 @@
           <a:bodyPr/>
           <a:lstStyle/>
           <a:p>
-            <a:endParaRPr lang="en-US" dirty="0"/>
+            <a:r>
+              <a:rPr lang="en-US" dirty="0"/>
+              <a:t>when a mobile device receives a system update, it usually serves one or more of these purposes: Fix issues, Provide new functionality, or Install unfinished features.</a:t>
+            </a:r>
+          </a:p>
+          <a:p>
+            <a:r>
+              <a:rPr lang="en-US" dirty="0"/>
+              <a:t>Modern cars, for example, require software updates, which are fetched over networks or downloaded via USB interfaces.</a:t>
+            </a:r>
+          </a:p>
+          <a:p>
+            <a:r>
+              <a:rPr lang="en-US" dirty="0"/>
+              <a:t>Beyond enabling system updates, architects must also address several key concerns such as data consistency, safety, deployment efficiency, and system extendibility.</a:t>
+            </a:r>
+          </a:p>
+          <a:p>
+            <a:r>
+              <a:rPr lang="en-US" dirty="0">
+                <a:solidFill>
+                  <a:schemeClr val="accent4">
+                    <a:lumMod val="50000"/>
+                  </a:schemeClr>
+                </a:solidFill>
+              </a:rPr>
+              <a:t>Maintaining data consistency: </a:t>
+            </a:r>
+            <a:r>
+              <a:rPr lang="en-US" dirty="0"/>
+              <a:t>Upgrades are usually one-way, so storing data in the cloud helps but cloud interactions must be tested. </a:t>
+            </a:r>
+          </a:p>
+          <a:p>
+            <a:r>
+              <a:rPr lang="en-US" dirty="0">
+                <a:solidFill>
+                  <a:schemeClr val="accent4">
+                    <a:lumMod val="50000"/>
+                  </a:schemeClr>
+                </a:solidFill>
+              </a:rPr>
+              <a:t>Safety: </a:t>
+            </a:r>
+            <a:r>
+              <a:rPr lang="en-US" dirty="0"/>
+              <a:t>Updates should only happen in safe system states, never during risky times like while a car is moving.</a:t>
+            </a:r>
           </a:p>
         </p:txBody>
       </p:sp>
@@ -5383,12 +5495,43 @@
           <a:chExt cx="0" cy="0"/>
         </a:xfrm>
       </p:grpSpPr>
-      <p:sp>
-        <p:nvSpPr>
-          <p:cNvPr id="2" name="Content Placeholder 1">
-            <a:extLst>
-              <a:ext uri="{FF2B5EF4-FFF2-40B4-BE49-F238E27FC236}">
-                <a16:creationId xmlns:a16="http://schemas.microsoft.com/office/drawing/2014/main" id="{B45E60EB-F59B-9689-3EDE-E38FA4346761}"/>
+      <p:pic>
+        <p:nvPicPr>
+          <p:cNvPr id="8" name="Picture Placeholder 7">
+            <a:extLst>
+              <a:ext uri="{FF2B5EF4-FFF2-40B4-BE49-F238E27FC236}">
+                <a16:creationId xmlns:a16="http://schemas.microsoft.com/office/drawing/2014/main" id="{86931882-E9F4-63B6-1180-0EE2EFB67DFB}"/>
+              </a:ext>
+            </a:extLst>
+          </p:cNvPr>
+          <p:cNvPicPr>
+            <a:picLocks noGrp="1" noChangeAspect="1"/>
+          </p:cNvPicPr>
+          <p:nvPr>
+            <p:ph type="pic" sz="quarter" idx="11"/>
+          </p:nvPr>
+        </p:nvPicPr>
+        <p:blipFill rotWithShape="1">
+          <a:blip r:embed="rId2">
+            <a:extLst>
+              <a:ext uri="{28A0092B-C50C-407E-A947-70E740481C1C}">
+                <a14:useLocalDpi xmlns:a14="http://schemas.microsoft.com/office/drawing/2010/main" val="0"/>
+              </a:ext>
+            </a:extLst>
+          </a:blip>
+          <a:srcRect l="-55339" r="-55339"/>
+          <a:stretch>
+            <a:fillRect/>
+          </a:stretch>
+        </p:blipFill>
+        <p:spPr/>
+      </p:pic>
+      <p:sp>
+        <p:nvSpPr>
+          <p:cNvPr id="3" name="Content Placeholder 2">
+            <a:extLst>
+              <a:ext uri="{FF2B5EF4-FFF2-40B4-BE49-F238E27FC236}">
+                <a16:creationId xmlns:a16="http://schemas.microsoft.com/office/drawing/2014/main" id="{6C5D87E9-E445-E030-9445-FA098297D0F2}"/>
               </a:ext>
             </a:extLst>
           </p:cNvPr>
@@ -5404,24 +5547,53 @@
           <a:bodyPr/>
           <a:lstStyle/>
           <a:p>
-            <a:endParaRPr lang="en-US"/>
-          </a:p>
-        </p:txBody>
-      </p:sp>
-      <p:sp>
-        <p:nvSpPr>
-          <p:cNvPr id="3" name="Title 2">
-            <a:extLst>
-              <a:ext uri="{FF2B5EF4-FFF2-40B4-BE49-F238E27FC236}">
-                <a16:creationId xmlns:a16="http://schemas.microsoft.com/office/drawing/2014/main" id="{98B62852-86A9-86DC-CCBE-CF96926B3F20}"/>
-              </a:ext>
-            </a:extLst>
-          </p:cNvPr>
-          <p:cNvSpPr>
-            <a:spLocks noGrp="1"/>
-          </p:cNvSpPr>
-          <p:nvPr>
-            <p:ph type="title"/>
+            <a:r>
+              <a:rPr lang="en-US" dirty="0">
+                <a:solidFill>
+                  <a:schemeClr val="accent4">
+                    <a:lumMod val="50000"/>
+                  </a:schemeClr>
+                </a:solidFill>
+              </a:rPr>
+              <a:t>Partial system deployment: </a:t>
+            </a:r>
+            <a:r>
+              <a:rPr lang="en-US" dirty="0"/>
+              <a:t>Design the system so that only small, frequently changing parts can be updated easily and automatically.</a:t>
+            </a:r>
+          </a:p>
+          <a:p>
+            <a:r>
+              <a:rPr lang="en-US" dirty="0">
+                <a:solidFill>
+                  <a:schemeClr val="accent4">
+                    <a:lumMod val="50000"/>
+                  </a:schemeClr>
+                </a:solidFill>
+              </a:rPr>
+              <a:t>Extendibility: </a:t>
+            </a:r>
+            <a:r>
+              <a:rPr lang="en-US" dirty="0"/>
+              <a:t>Mobile vehicle systems tend to have relatively long lifetimes. Retrofitting them will likely become necessary at some point.</a:t>
+            </a:r>
+          </a:p>
+        </p:txBody>
+      </p:sp>
+      <p:sp>
+        <p:nvSpPr>
+          <p:cNvPr id="4" name="Content Placeholder 3">
+            <a:extLst>
+              <a:ext uri="{FF2B5EF4-FFF2-40B4-BE49-F238E27FC236}">
+                <a16:creationId xmlns:a16="http://schemas.microsoft.com/office/drawing/2014/main" id="{3810E37B-13AE-54B3-9CBD-CD92D1BEAB25}"/>
+              </a:ext>
+            </a:extLst>
+          </p:cNvPr>
+          <p:cNvSpPr>
+            <a:spLocks noGrp="1"/>
+          </p:cNvSpPr>
+          <p:nvPr>
+            <p:ph sz="half" idx="12"/>
           </p:nvPr>
         </p:nvSpPr>
         <p:spPr/>
@@ -5431,25 +5603,56 @@
           <a:p>
             <a:r>
               <a:rPr lang="en-US" dirty="0"/>
-              <a:t>Logging</a:t>
-            </a:r>
-          </a:p>
-        </p:txBody>
-      </p:sp>
-      <p:sp>
-        <p:nvSpPr>
-          <p:cNvPr id="4" name="Slide Number Placeholder 3">
-            <a:extLst>
-              <a:ext uri="{FF2B5EF4-FFF2-40B4-BE49-F238E27FC236}">
-                <a16:creationId xmlns:a16="http://schemas.microsoft.com/office/drawing/2014/main" id="{0B3306FD-9C0A-07F8-EA6C-5A51671F5A8B}"/>
-              </a:ext>
-            </a:extLst>
-          </p:cNvPr>
-          <p:cNvSpPr>
-            <a:spLocks noGrp="1"/>
-          </p:cNvSpPr>
-          <p:nvPr>
-            <p:ph type="sldNum" sz="quarter" idx="10"/>
+              <a:t>Retrofitting means adding new technology to old systems, either by replacement or addition.</a:t>
+            </a:r>
+          </a:p>
+          <a:p>
+            <a:endParaRPr lang="en-US" dirty="0"/>
+          </a:p>
+        </p:txBody>
+      </p:sp>
+      <p:sp>
+        <p:nvSpPr>
+          <p:cNvPr id="5" name="Title 4">
+            <a:extLst>
+              <a:ext uri="{FF2B5EF4-FFF2-40B4-BE49-F238E27FC236}">
+                <a16:creationId xmlns:a16="http://schemas.microsoft.com/office/drawing/2014/main" id="{6F3686E3-C517-8484-8EC9-6AD01BFE5C94}"/>
+              </a:ext>
+            </a:extLst>
+          </p:cNvPr>
+          <p:cNvSpPr>
+            <a:spLocks noGrp="1"/>
+          </p:cNvSpPr>
+          <p:nvPr>
+            <p:ph type="title"/>
+          </p:nvPr>
+        </p:nvSpPr>
+        <p:spPr/>
+        <p:txBody>
+          <a:bodyPr/>
+          <a:lstStyle/>
+          <a:p>
+            <a:r>
+              <a:rPr lang="en-US" dirty="0"/>
+              <a:t>Deploying Updates</a:t>
+            </a:r>
+          </a:p>
+        </p:txBody>
+      </p:sp>
+      <p:sp>
+        <p:nvSpPr>
+          <p:cNvPr id="6" name="Slide Number Placeholder 5">
+            <a:extLst>
+              <a:ext uri="{FF2B5EF4-FFF2-40B4-BE49-F238E27FC236}">
+                <a16:creationId xmlns:a16="http://schemas.microsoft.com/office/drawing/2014/main" id="{1CE730FC-C007-1847-E38A-F1E8DA53A69C}"/>
+              </a:ext>
+            </a:extLst>
+          </p:cNvPr>
+          <p:cNvSpPr>
+            <a:spLocks noGrp="1"/>
+          </p:cNvSpPr>
+          <p:nvPr>
+            <p:ph type="sldNum" sz="quarter" idx="13"/>
           </p:nvPr>
         </p:nvSpPr>
         <p:spPr/>
@@ -5469,7 +5672,7 @@
     </p:spTree>
     <p:extLst>
       <p:ext uri="{BB962C8B-B14F-4D97-AF65-F5344CB8AC3E}">
-        <p14:creationId xmlns:p14="http://schemas.microsoft.com/office/powerpoint/2010/main" val="1541215525"/>
+        <p14:creationId xmlns:p14="http://schemas.microsoft.com/office/powerpoint/2010/main" val="1832975255"/>
       </p:ext>
     </p:extLst>
   </p:cSld>
@@ -5501,6 +5704,140 @@
           <p:cNvPr id="2" name="Content Placeholder 1">
             <a:extLst>
               <a:ext uri="{FF2B5EF4-FFF2-40B4-BE49-F238E27FC236}">
+                <a16:creationId xmlns:a16="http://schemas.microsoft.com/office/drawing/2014/main" id="{B45E60EB-F59B-9689-3EDE-E38FA4346761}"/>
+              </a:ext>
+            </a:extLst>
+          </p:cNvPr>
+          <p:cNvSpPr>
+            <a:spLocks noGrp="1"/>
+          </p:cNvSpPr>
+          <p:nvPr>
+            <p:ph sz="half" idx="2"/>
+          </p:nvPr>
+        </p:nvSpPr>
+        <p:spPr/>
+        <p:txBody>
+          <a:bodyPr/>
+          <a:lstStyle/>
+          <a:p>
+            <a:r>
+              <a:rPr lang="en-US" dirty="0"/>
+              <a:t>Logs are critical when investigating and resolving incidents that have occurred or may occur.</a:t>
+            </a:r>
+          </a:p>
+          <a:p>
+            <a:r>
+              <a:rPr lang="en-US" dirty="0"/>
+              <a:t>In mobile systems, the logs should be offloaded to a location where they are accessible regardless of the accessibility of the mobile system itself.</a:t>
+            </a:r>
+          </a:p>
+          <a:p>
+            <a:r>
+              <a:rPr lang="en-US" dirty="0"/>
+              <a:t>Many software applications do something similar when they encounter a problem and ask for permission to send the details to the vendor.</a:t>
+            </a:r>
+          </a:p>
+          <a:p>
+            <a:r>
+              <a:rPr lang="en-US" dirty="0"/>
+              <a:t>For mobile systems, this logging capability is particularly important, and they may very well not ask permission to obtain the data.</a:t>
+            </a:r>
+          </a:p>
+        </p:txBody>
+      </p:sp>
+      <p:sp>
+        <p:nvSpPr>
+          <p:cNvPr id="3" name="Title 2">
+            <a:extLst>
+              <a:ext uri="{FF2B5EF4-FFF2-40B4-BE49-F238E27FC236}">
+                <a16:creationId xmlns:a16="http://schemas.microsoft.com/office/drawing/2014/main" id="{98B62852-86A9-86DC-CCBE-CF96926B3F20}"/>
+              </a:ext>
+            </a:extLst>
+          </p:cNvPr>
+          <p:cNvSpPr>
+            <a:spLocks noGrp="1"/>
+          </p:cNvSpPr>
+          <p:nvPr>
+            <p:ph type="title"/>
+          </p:nvPr>
+        </p:nvSpPr>
+        <p:spPr/>
+        <p:txBody>
+          <a:bodyPr/>
+          <a:lstStyle/>
+          <a:p>
+            <a:r>
+              <a:rPr lang="en-US" dirty="0"/>
+              <a:t>Logging</a:t>
+            </a:r>
+          </a:p>
+        </p:txBody>
+      </p:sp>
+      <p:sp>
+        <p:nvSpPr>
+          <p:cNvPr id="4" name="Slide Number Placeholder 3">
+            <a:extLst>
+              <a:ext uri="{FF2B5EF4-FFF2-40B4-BE49-F238E27FC236}">
+                <a16:creationId xmlns:a16="http://schemas.microsoft.com/office/drawing/2014/main" id="{0B3306FD-9C0A-07F8-EA6C-5A51671F5A8B}"/>
+              </a:ext>
+            </a:extLst>
+          </p:cNvPr>
+          <p:cNvSpPr>
+            <a:spLocks noGrp="1"/>
+          </p:cNvSpPr>
+          <p:nvPr>
+            <p:ph type="sldNum" sz="quarter" idx="10"/>
+          </p:nvPr>
+        </p:nvSpPr>
+        <p:spPr/>
+        <p:txBody>
+          <a:bodyPr/>
+          <a:lstStyle/>
+          <a:p>
+            <a:fld id="{AE311D09-C3D9-45E8-99CE-78E12234EEAD}" type="slidenum">
+              <a:rPr lang="en-US" smtClean="0"/>
+              <a:pPr/>
+              <a:t>21</a:t>
+            </a:fld>
+            <a:endParaRPr lang="en-US" dirty="0"/>
+          </a:p>
+        </p:txBody>
+      </p:sp>
+    </p:spTree>
+    <p:extLst>
+      <p:ext uri="{BB962C8B-B14F-4D97-AF65-F5344CB8AC3E}">
+        <p14:creationId xmlns:p14="http://schemas.microsoft.com/office/powerpoint/2010/main" val="1541215525"/>
+      </p:ext>
+    </p:extLst>
+  </p:cSld>
+  <p:clrMapOvr>
+    <a:masterClrMapping/>
+  </p:clrMapOvr>
+</p:sld>
+</file>
+
+<file path=ppt/slides/slide22.xml><?xml version="1.0" encoding="utf-8"?>
+<p:sld xmlns:a="http://schemas.openxmlformats.org/drawingml/2006/main" xmlns:r="http://schemas.openxmlformats.org/officeDocument/2006/relationships" xmlns:p="http://schemas.openxmlformats.org/presentationml/2006/main">
+  <p:cSld>
+    <p:spTree>
+      <p:nvGrpSpPr>
+        <p:cNvPr id="1" name=""/>
+        <p:cNvGrpSpPr/>
+        <p:nvPr/>
+      </p:nvGrpSpPr>
+      <p:grpSpPr>
+        <a:xfrm>
+          <a:off x="0" y="0"/>
+          <a:ext cx="0" cy="0"/>
+          <a:chOff x="0" y="0"/>
+          <a:chExt cx="0" cy="0"/>
+        </a:xfrm>
+      </p:grpSpPr>
+      <p:sp>
+        <p:nvSpPr>
+          <p:cNvPr id="2" name="Content Placeholder 1">
+            <a:extLst>
+              <a:ext uri="{FF2B5EF4-FFF2-40B4-BE49-F238E27FC236}">
                 <a16:creationId xmlns:a16="http://schemas.microsoft.com/office/drawing/2014/main" id="{B5BDAD25-44F3-FE7A-A647-59F99A73B8E0}"/>
               </a:ext>
             </a:extLst>
@@ -5626,7 +5963,7 @@
             <a:fld id="{AE311D09-C3D9-45E8-99CE-78E12234EEAD}" type="slidenum">
               <a:rPr lang="en-US" smtClean="0"/>
               <a:pPr/>
-              <a:t>21</a:t>
+              <a:t>22</a:t>
             </a:fld>
             <a:endParaRPr lang="en-US" dirty="0"/>
           </a:p>
